--- a/docs/AgentForge-PresentationV10.pptx
+++ b/docs/AgentForge-PresentationV10.pptx
@@ -36,19 +36,19 @@
     <p:sldId id="293" r:id="rId30"/>
     <p:sldId id="294" r:id="rId31"/>
     <p:sldId id="295" r:id="rId32"/>
-    <p:sldId id="296" r:id="rId46"/>
-    <p:sldId id="297" r:id="rId47"/>
-    <p:sldId id="298" r:id="rId48"/>
-    <p:sldId id="299" r:id="rId49"/>
-    <p:sldId id="285" r:id="rId33"/>
-    <p:sldId id="286" r:id="rId34"/>
-    <p:sldId id="287" r:id="rId35"/>
-    <p:sldId id="288" r:id="rId36"/>
-    <p:sldId id="289" r:id="rId37"/>
-    <p:sldId id="290" r:id="rId38"/>
-    <p:sldId id="291" r:id="rId39"/>
-    <p:sldId id="292" r:id="rId40"/>
-    <p:sldId id="281" r:id="rId41"/>
+    <p:sldId id="296" r:id="rId33"/>
+    <p:sldId id="297" r:id="rId34"/>
+    <p:sldId id="298" r:id="rId35"/>
+    <p:sldId id="299" r:id="rId36"/>
+    <p:sldId id="285" r:id="rId37"/>
+    <p:sldId id="286" r:id="rId38"/>
+    <p:sldId id="287" r:id="rId39"/>
+    <p:sldId id="288" r:id="rId40"/>
+    <p:sldId id="289" r:id="rId41"/>
+    <p:sldId id="290" r:id="rId42"/>
+    <p:sldId id="291" r:id="rId43"/>
+    <p:sldId id="292" r:id="rId44"/>
+    <p:sldId id="281" r:id="rId45"/>
   </p:sldIdLst>
   <p:sldSz cx="12188825" cy="6858000"/>
   <p:notesSz cx="6858000" cy="9144000"/>
@@ -345,7 +345,7 @@
           <a:p>
             <a:fld id="{5BCAD085-E8A6-8845-BD4E-CB4CCA059FC4}" type="datetimeFigureOut">
               <a:rPr lang="en-US" smtClean="0"/>
-              <a:t>7/22/2026</a:t>
+              <a:t>7/23/2026</a:t>
             </a:fld>
             <a:endParaRPr lang="en-US"/>
           </a:p>
@@ -513,7 +513,7 @@
           <a:p>
             <a:fld id="{5BCAD085-E8A6-8845-BD4E-CB4CCA059FC4}" type="datetimeFigureOut">
               <a:rPr lang="en-US" smtClean="0"/>
-              <a:t>7/22/2026</a:t>
+              <a:t>7/23/2026</a:t>
             </a:fld>
             <a:endParaRPr lang="en-US"/>
           </a:p>
@@ -691,7 +691,7 @@
           <a:p>
             <a:fld id="{5BCAD085-E8A6-8845-BD4E-CB4CCA059FC4}" type="datetimeFigureOut">
               <a:rPr lang="en-US" smtClean="0"/>
-              <a:t>7/22/2026</a:t>
+              <a:t>7/23/2026</a:t>
             </a:fld>
             <a:endParaRPr lang="en-US"/>
           </a:p>
@@ -859,7 +859,7 @@
           <a:p>
             <a:fld id="{5BCAD085-E8A6-8845-BD4E-CB4CCA059FC4}" type="datetimeFigureOut">
               <a:rPr lang="en-US" smtClean="0"/>
-              <a:t>7/22/2026</a:t>
+              <a:t>7/23/2026</a:t>
             </a:fld>
             <a:endParaRPr lang="en-US"/>
           </a:p>
@@ -1104,7 +1104,7 @@
           <a:p>
             <a:fld id="{5BCAD085-E8A6-8845-BD4E-CB4CCA059FC4}" type="datetimeFigureOut">
               <a:rPr lang="en-US" smtClean="0"/>
-              <a:t>7/22/2026</a:t>
+              <a:t>7/23/2026</a:t>
             </a:fld>
             <a:endParaRPr lang="en-US"/>
           </a:p>
@@ -1389,7 +1389,7 @@
           <a:p>
             <a:fld id="{5BCAD085-E8A6-8845-BD4E-CB4CCA059FC4}" type="datetimeFigureOut">
               <a:rPr lang="en-US" smtClean="0"/>
-              <a:t>7/22/2026</a:t>
+              <a:t>7/23/2026</a:t>
             </a:fld>
             <a:endParaRPr lang="en-US"/>
           </a:p>
@@ -1808,7 +1808,7 @@
           <a:p>
             <a:fld id="{5BCAD085-E8A6-8845-BD4E-CB4CCA059FC4}" type="datetimeFigureOut">
               <a:rPr lang="en-US" smtClean="0"/>
-              <a:t>7/22/2026</a:t>
+              <a:t>7/23/2026</a:t>
             </a:fld>
             <a:endParaRPr lang="en-US"/>
           </a:p>
@@ -1925,7 +1925,7 @@
           <a:p>
             <a:fld id="{5BCAD085-E8A6-8845-BD4E-CB4CCA059FC4}" type="datetimeFigureOut">
               <a:rPr lang="en-US" smtClean="0"/>
-              <a:t>7/22/2026</a:t>
+              <a:t>7/23/2026</a:t>
             </a:fld>
             <a:endParaRPr lang="en-US"/>
           </a:p>
@@ -2020,7 +2020,7 @@
           <a:p>
             <a:fld id="{5BCAD085-E8A6-8845-BD4E-CB4CCA059FC4}" type="datetimeFigureOut">
               <a:rPr lang="en-US" smtClean="0"/>
-              <a:t>7/22/2026</a:t>
+              <a:t>7/23/2026</a:t>
             </a:fld>
             <a:endParaRPr lang="en-US"/>
           </a:p>
@@ -2295,7 +2295,7 @@
           <a:p>
             <a:fld id="{5BCAD085-E8A6-8845-BD4E-CB4CCA059FC4}" type="datetimeFigureOut">
               <a:rPr lang="en-US" smtClean="0"/>
-              <a:t>7/22/2026</a:t>
+              <a:t>7/23/2026</a:t>
             </a:fld>
             <a:endParaRPr lang="en-US"/>
           </a:p>
@@ -2547,7 +2547,7 @@
           <a:p>
             <a:fld id="{5BCAD085-E8A6-8845-BD4E-CB4CCA059FC4}" type="datetimeFigureOut">
               <a:rPr lang="en-US" smtClean="0"/>
-              <a:t>7/22/2026</a:t>
+              <a:t>7/23/2026</a:t>
             </a:fld>
             <a:endParaRPr lang="en-US"/>
           </a:p>
@@ -2758,7 +2758,7 @@
           <a:p>
             <a:fld id="{5BCAD085-E8A6-8845-BD4E-CB4CCA059FC4}" type="datetimeFigureOut">
               <a:rPr lang="en-US" smtClean="0"/>
-              <a:t>7/22/2026</a:t>
+              <a:t>7/23/2026</a:t>
             </a:fld>
             <a:endParaRPr lang="en-US"/>
           </a:p>
@@ -5661,6 +5661,7 @@
           <a:lstStyle/>
           <a:p>
             <a:pPr algn="ctr"/>
+            <a:endParaRPr/>
           </a:p>
         </p:txBody>
       </p:sp>
@@ -5705,6 +5706,7 @@
           <a:lstStyle/>
           <a:p>
             <a:pPr algn="ctr"/>
+            <a:endParaRPr/>
           </a:p>
         </p:txBody>
       </p:sp>
@@ -34648,7 +34650,7 @@
 </file>
 
 <file path=ppt/slides/slide32.xml><?xml version="1.0" encoding="utf-8"?>
-<p:sld xmlns:a="http://schemas.openxmlformats.org/drawingml/2006/main" xmlns:p="http://schemas.openxmlformats.org/presentationml/2006/main" xmlns:r="http://schemas.openxmlformats.org/officeDocument/2006/relationships">
+<p:sld xmlns:a="http://schemas.openxmlformats.org/drawingml/2006/main" xmlns:r="http://schemas.openxmlformats.org/officeDocument/2006/relationships" xmlns:p="http://schemas.openxmlformats.org/presentationml/2006/main">
   <p:cSld>
     <p:spTree>
       <p:nvGrpSpPr>
@@ -34656,7 +34658,14 @@
         <p:cNvGrpSpPr/>
         <p:nvPr/>
       </p:nvGrpSpPr>
-      <p:grpSpPr/>
+      <p:grpSpPr>
+        <a:xfrm>
+          <a:off x="0" y="0"/>
+          <a:ext cx="0" cy="0"/>
+          <a:chOff x="0" y="0"/>
+          <a:chExt cx="0" cy="0"/>
+        </a:xfrm>
+      </p:grpSpPr>
       <p:sp>
         <p:nvSpPr>
           <p:cNvPr id="2" name="Rectangle 1"/>
@@ -34698,6 +34707,7 @@
           <a:lstStyle/>
           <a:p>
             <a:pPr algn="ctr"/>
+            <a:endParaRPr/>
           </a:p>
         </p:txBody>
       </p:sp>
@@ -34742,6 +34752,7 @@
           <a:lstStyle/>
           <a:p>
             <a:pPr algn="ctr"/>
+            <a:endParaRPr/>
           </a:p>
         </p:txBody>
       </p:sp>
@@ -34852,6 +34863,7 @@
           <a:lstStyle/>
           <a:p>
             <a:pPr algn="ctr"/>
+            <a:endParaRPr/>
           </a:p>
         </p:txBody>
       </p:sp>
@@ -34962,6 +34974,7 @@
           <a:lstStyle/>
           <a:p>
             <a:pPr algn="ctr"/>
+            <a:endParaRPr/>
           </a:p>
         </p:txBody>
       </p:sp>
@@ -35072,6 +35085,7 @@
           <a:lstStyle/>
           <a:p>
             <a:pPr algn="ctr"/>
+            <a:endParaRPr/>
           </a:p>
         </p:txBody>
       </p:sp>
@@ -35182,6 +35196,7 @@
           <a:lstStyle/>
           <a:p>
             <a:pPr algn="ctr"/>
+            <a:endParaRPr/>
           </a:p>
         </p:txBody>
       </p:sp>
@@ -35292,6 +35307,7 @@
           <a:lstStyle/>
           <a:p>
             <a:pPr algn="ctr"/>
+            <a:endParaRPr/>
           </a:p>
         </p:txBody>
       </p:sp>
@@ -35403,7 +35419,7 @@
 </file>
 
 <file path=ppt/slides/slide33.xml><?xml version="1.0" encoding="utf-8"?>
-<p:sld xmlns:a="http://schemas.openxmlformats.org/drawingml/2006/main" xmlns:p="http://schemas.openxmlformats.org/presentationml/2006/main" xmlns:r="http://schemas.openxmlformats.org/officeDocument/2006/relationships">
+<p:sld xmlns:a="http://schemas.openxmlformats.org/drawingml/2006/main" xmlns:r="http://schemas.openxmlformats.org/officeDocument/2006/relationships" xmlns:p="http://schemas.openxmlformats.org/presentationml/2006/main">
   <p:cSld>
     <p:spTree>
       <p:nvGrpSpPr>
@@ -35411,7 +35427,14 @@
         <p:cNvGrpSpPr/>
         <p:nvPr/>
       </p:nvGrpSpPr>
-      <p:grpSpPr/>
+      <p:grpSpPr>
+        <a:xfrm>
+          <a:off x="0" y="0"/>
+          <a:ext cx="0" cy="0"/>
+          <a:chOff x="0" y="0"/>
+          <a:chExt cx="0" cy="0"/>
+        </a:xfrm>
+      </p:grpSpPr>
       <p:sp>
         <p:nvSpPr>
           <p:cNvPr id="2" name="Rectangle 1"/>
@@ -35453,6 +35476,7 @@
           <a:lstStyle/>
           <a:p>
             <a:pPr algn="ctr"/>
+            <a:endParaRPr/>
           </a:p>
         </p:txBody>
       </p:sp>
@@ -35497,6 +35521,7 @@
           <a:lstStyle/>
           <a:p>
             <a:pPr algn="ctr"/>
+            <a:endParaRPr/>
           </a:p>
         </p:txBody>
       </p:sp>
@@ -35607,6 +35632,7 @@
           <a:lstStyle/>
           <a:p>
             <a:pPr algn="ctr"/>
+            <a:endParaRPr/>
           </a:p>
         </p:txBody>
       </p:sp>
@@ -35717,6 +35743,7 @@
           <a:lstStyle/>
           <a:p>
             <a:pPr algn="ctr"/>
+            <a:endParaRPr/>
           </a:p>
         </p:txBody>
       </p:sp>
@@ -35827,6 +35854,7 @@
           <a:lstStyle/>
           <a:p>
             <a:pPr algn="ctr"/>
+            <a:endParaRPr/>
           </a:p>
         </p:txBody>
       </p:sp>
@@ -35937,6 +35965,7 @@
           <a:lstStyle/>
           <a:p>
             <a:pPr algn="ctr"/>
+            <a:endParaRPr/>
           </a:p>
         </p:txBody>
       </p:sp>
@@ -36047,6 +36076,7 @@
           <a:lstStyle/>
           <a:p>
             <a:pPr algn="ctr"/>
+            <a:endParaRPr/>
           </a:p>
         </p:txBody>
       </p:sp>
@@ -36158,7 +36188,7 @@
 </file>
 
 <file path=ppt/slides/slide34.xml><?xml version="1.0" encoding="utf-8"?>
-<p:sld xmlns:a="http://schemas.openxmlformats.org/drawingml/2006/main" xmlns:p="http://schemas.openxmlformats.org/presentationml/2006/main" xmlns:r="http://schemas.openxmlformats.org/officeDocument/2006/relationships">
+<p:sld xmlns:a="http://schemas.openxmlformats.org/drawingml/2006/main" xmlns:r="http://schemas.openxmlformats.org/officeDocument/2006/relationships" xmlns:p="http://schemas.openxmlformats.org/presentationml/2006/main">
   <p:cSld>
     <p:spTree>
       <p:nvGrpSpPr>
@@ -36166,7 +36196,14 @@
         <p:cNvGrpSpPr/>
         <p:nvPr/>
       </p:nvGrpSpPr>
-      <p:grpSpPr/>
+      <p:grpSpPr>
+        <a:xfrm>
+          <a:off x="0" y="0"/>
+          <a:ext cx="0" cy="0"/>
+          <a:chOff x="0" y="0"/>
+          <a:chExt cx="0" cy="0"/>
+        </a:xfrm>
+      </p:grpSpPr>
       <p:sp>
         <p:nvSpPr>
           <p:cNvPr id="2" name="Rectangle 1"/>
@@ -36208,6 +36245,7 @@
           <a:lstStyle/>
           <a:p>
             <a:pPr algn="ctr"/>
+            <a:endParaRPr/>
           </a:p>
         </p:txBody>
       </p:sp>
@@ -36252,6 +36290,7 @@
           <a:lstStyle/>
           <a:p>
             <a:pPr algn="ctr"/>
+            <a:endParaRPr/>
           </a:p>
         </p:txBody>
       </p:sp>
@@ -36362,6 +36401,7 @@
           <a:lstStyle/>
           <a:p>
             <a:pPr algn="ctr"/>
+            <a:endParaRPr/>
           </a:p>
         </p:txBody>
       </p:sp>
@@ -36538,6 +36578,7 @@
           <a:lstStyle/>
           <a:p>
             <a:pPr algn="ctr"/>
+            <a:endParaRPr/>
           </a:p>
         </p:txBody>
       </p:sp>
@@ -36714,6 +36755,7 @@
           <a:lstStyle/>
           <a:p>
             <a:pPr algn="ctr"/>
+            <a:endParaRPr/>
           </a:p>
         </p:txBody>
       </p:sp>
@@ -36890,6 +36932,7 @@
           <a:lstStyle/>
           <a:p>
             <a:pPr algn="ctr"/>
+            <a:endParaRPr/>
           </a:p>
         </p:txBody>
       </p:sp>
@@ -37066,6 +37109,7 @@
           <a:lstStyle/>
           <a:p>
             <a:pPr algn="ctr"/>
+            <a:endParaRPr/>
           </a:p>
         </p:txBody>
       </p:sp>
@@ -37242,6 +37286,7 @@
           <a:lstStyle/>
           <a:p>
             <a:pPr algn="ctr"/>
+            <a:endParaRPr/>
           </a:p>
         </p:txBody>
       </p:sp>
@@ -37444,7 +37489,7 @@
         <p:spPr>
           <a:xfrm>
             <a:off x="0" y="0"/>
-            <a:ext cx="12188825" cy="6858000"/>
+            <a:ext cx="12188952" cy="6858000"/>
           </a:xfrm>
           <a:prstGeom prst="rect">
             <a:avLst/>
@@ -37489,7 +37534,7 @@
         <p:spPr>
           <a:xfrm>
             <a:off x="0" y="73152"/>
-            <a:ext cx="12188825" cy="45720"/>
+            <a:ext cx="12188952" cy="45720"/>
           </a:xfrm>
           <a:prstGeom prst="rect">
             <a:avLst/>
@@ -37547,13 +37592,14 @@
           </a:bodyPr>
           <a:lstStyle/>
           <a:p>
+            <a:pPr algn="l"/>
             <a:r>
               <a:rPr sz="2600" b="1">
                 <a:solidFill>
                   <a:srgbClr val="FFFFFF"/>
                 </a:solidFill>
               </a:rPr>
-              <a:t>How To Use: Visual Builder — Templates &amp; Auto-Build</a:t>
+              <a:t>Workflow Builder — Testing &amp; Human-in-the-Loop UX</a:t>
             </a:r>
           </a:p>
         </p:txBody>
@@ -37566,7 +37612,606 @@
         </p:nvSpPr>
         <p:spPr>
           <a:xfrm>
-            <a:off x="11731752" y="6492240"/>
+            <a:off x="457200" y="868680"/>
+            <a:ext cx="11247120" cy="548640"/>
+          </a:xfrm>
+          <a:prstGeom prst="rect">
+            <a:avLst/>
+          </a:prstGeom>
+          <a:noFill/>
+        </p:spPr>
+        <p:txBody>
+          <a:bodyPr wrap="square">
+            <a:spAutoFit/>
+          </a:bodyPr>
+          <a:lstStyle/>
+          <a:p>
+            <a:pPr algn="l"/>
+            <a:r>
+              <a:rPr sz="1300" b="0">
+                <a:solidFill>
+                  <a:srgbClr val="CBD5E1"/>
+                </a:solidFill>
+              </a:rPr>
+              <a:t>A tester reported “Save Workflow saved with a junk timestamp name” and “the approval step feels like an error.” Both traced to real gaps, now closed — verified live against a running backend, not just unit tests.</a:t>
+            </a:r>
+          </a:p>
+        </p:txBody>
+      </p:sp>
+      <p:sp>
+        <p:nvSpPr>
+          <p:cNvPr id="6" name="Rectangle 5"/>
+          <p:cNvSpPr/>
+          <p:nvPr/>
+        </p:nvSpPr>
+        <p:spPr>
+          <a:xfrm>
+            <a:off x="365760" y="1536192"/>
+            <a:ext cx="73152" cy="777240"/>
+          </a:xfrm>
+          <a:prstGeom prst="rect">
+            <a:avLst/>
+          </a:prstGeom>
+          <a:solidFill>
+            <a:srgbClr val="606EF5"/>
+          </a:solidFill>
+          <a:ln>
+            <a:noFill/>
+          </a:ln>
+          <a:effectLst/>
+        </p:spPr>
+        <p:style>
+          <a:lnRef idx="1">
+            <a:schemeClr val="accent1"/>
+          </a:lnRef>
+          <a:fillRef idx="3">
+            <a:schemeClr val="accent1"/>
+          </a:fillRef>
+          <a:effectRef idx="2">
+            <a:schemeClr val="accent1"/>
+          </a:effectRef>
+          <a:fontRef idx="minor">
+            <a:schemeClr val="lt1"/>
+          </a:fontRef>
+        </p:style>
+        <p:txBody>
+          <a:bodyPr rtlCol="0" anchor="ctr"/>
+          <a:lstStyle/>
+          <a:p>
+            <a:pPr algn="ctr"/>
+            <a:endParaRPr/>
+          </a:p>
+        </p:txBody>
+      </p:sp>
+      <p:sp>
+        <p:nvSpPr>
+          <p:cNvPr id="7" name="TextBox 6"/>
+          <p:cNvSpPr txBox="1"/>
+          <p:nvPr/>
+        </p:nvSpPr>
+        <p:spPr>
+          <a:xfrm>
+            <a:off x="594360" y="1554480"/>
+            <a:ext cx="10972800" cy="365760"/>
+          </a:xfrm>
+          <a:prstGeom prst="rect">
+            <a:avLst/>
+          </a:prstGeom>
+          <a:noFill/>
+        </p:spPr>
+        <p:txBody>
+          <a:bodyPr wrap="square">
+            <a:spAutoFit/>
+          </a:bodyPr>
+          <a:lstStyle/>
+          <a:p>
+            <a:pPr algn="l"/>
+            <a:r>
+              <a:rPr sz="1400" b="1">
+                <a:solidFill>
+                  <a:srgbClr val="606EF5"/>
+                </a:solidFill>
+              </a:rPr>
+              <a:t>💾  Save Workflow — Real Names, Not Timestamps</a:t>
+            </a:r>
+          </a:p>
+        </p:txBody>
+      </p:sp>
+      <p:sp>
+        <p:nvSpPr>
+          <p:cNvPr id="8" name="TextBox 7"/>
+          <p:cNvSpPr txBox="1"/>
+          <p:nvPr/>
+        </p:nvSpPr>
+        <p:spPr>
+          <a:xfrm>
+            <a:off x="594360" y="1920303"/>
+            <a:ext cx="11064240" cy="457200"/>
+          </a:xfrm>
+          <a:prstGeom prst="rect">
+            <a:avLst/>
+          </a:prstGeom>
+          <a:noFill/>
+        </p:spPr>
+        <p:txBody>
+          <a:bodyPr wrap="square">
+            <a:spAutoFit/>
+          </a:bodyPr>
+          <a:lstStyle/>
+          <a:p>
+            <a:pPr algn="l"/>
+            <a:r>
+              <a:rPr sz="1100" b="0">
+                <a:solidFill>
+                  <a:srgbClr val="CBD5E1"/>
+                </a:solidFill>
+              </a:rPr>
+              <a:t>“Save Workflow” only wrote to browser localStorage and never reached the backend — the junk “Workflow 8:14:41 PM” entries actually came from Run/Deploy auto-saving silently to get a workflow_id. Save Workflow now prompts for a real name and persists it directly.</a:t>
+            </a:r>
+          </a:p>
+        </p:txBody>
+      </p:sp>
+      <p:sp>
+        <p:nvSpPr>
+          <p:cNvPr id="9" name="Rectangle 8"/>
+          <p:cNvSpPr/>
+          <p:nvPr/>
+        </p:nvSpPr>
+        <p:spPr>
+          <a:xfrm>
+            <a:off x="365760" y="2432304"/>
+            <a:ext cx="73152" cy="777240"/>
+          </a:xfrm>
+          <a:prstGeom prst="rect">
+            <a:avLst/>
+          </a:prstGeom>
+          <a:solidFill>
+            <a:srgbClr val="606EF5"/>
+          </a:solidFill>
+          <a:ln>
+            <a:noFill/>
+          </a:ln>
+          <a:effectLst/>
+        </p:spPr>
+        <p:style>
+          <a:lnRef idx="1">
+            <a:schemeClr val="accent1"/>
+          </a:lnRef>
+          <a:fillRef idx="3">
+            <a:schemeClr val="accent1"/>
+          </a:fillRef>
+          <a:effectRef idx="2">
+            <a:schemeClr val="accent1"/>
+          </a:effectRef>
+          <a:fontRef idx="minor">
+            <a:schemeClr val="lt1"/>
+          </a:fontRef>
+        </p:style>
+        <p:txBody>
+          <a:bodyPr rtlCol="0" anchor="ctr"/>
+          <a:lstStyle/>
+          <a:p>
+            <a:pPr algn="ctr"/>
+            <a:endParaRPr/>
+          </a:p>
+        </p:txBody>
+      </p:sp>
+      <p:sp>
+        <p:nvSpPr>
+          <p:cNvPr id="10" name="TextBox 9"/>
+          <p:cNvSpPr txBox="1"/>
+          <p:nvPr/>
+        </p:nvSpPr>
+        <p:spPr>
+          <a:xfrm>
+            <a:off x="594360" y="2450592"/>
+            <a:ext cx="10972800" cy="365760"/>
+          </a:xfrm>
+          <a:prstGeom prst="rect">
+            <a:avLst/>
+          </a:prstGeom>
+          <a:noFill/>
+        </p:spPr>
+        <p:txBody>
+          <a:bodyPr wrap="square">
+            <a:spAutoFit/>
+          </a:bodyPr>
+          <a:lstStyle/>
+          <a:p>
+            <a:pPr algn="l"/>
+            <a:r>
+              <a:rPr sz="1400" b="1">
+                <a:solidFill>
+                  <a:srgbClr val="606EF5"/>
+                </a:solidFill>
+              </a:rPr>
+              <a:t>🗂️  Browse &amp; Load Saved Workflows</a:t>
+            </a:r>
+          </a:p>
+        </p:txBody>
+      </p:sp>
+      <p:sp>
+        <p:nvSpPr>
+          <p:cNvPr id="11" name="TextBox 10"/>
+          <p:cNvSpPr txBox="1"/>
+          <p:nvPr/>
+        </p:nvSpPr>
+        <p:spPr>
+          <a:xfrm>
+            <a:off x="594360" y="2816415"/>
+            <a:ext cx="11064240" cy="457200"/>
+          </a:xfrm>
+          <a:prstGeom prst="rect">
+            <a:avLst/>
+          </a:prstGeom>
+          <a:noFill/>
+        </p:spPr>
+        <p:txBody>
+          <a:bodyPr wrap="square">
+            <a:spAutoFit/>
+          </a:bodyPr>
+          <a:lstStyle/>
+          <a:p>
+            <a:pPr algn="l"/>
+            <a:r>
+              <a:rPr sz="1100" b="0">
+                <a:solidFill>
+                  <a:srgbClr val="CBD5E1"/>
+                </a:solidFill>
+              </a:rPr>
+              <a:t>Load now opens a searchable picker over every backend-saved workflow (name, node count, last updated) instead of silently reading localStorage — selecting one loads it straight onto the canvas, with legacy flat-format workflows normalized so they render instead of crashing.</a:t>
+            </a:r>
+          </a:p>
+        </p:txBody>
+      </p:sp>
+      <p:sp>
+        <p:nvSpPr>
+          <p:cNvPr id="12" name="Rectangle 11"/>
+          <p:cNvSpPr/>
+          <p:nvPr/>
+        </p:nvSpPr>
+        <p:spPr>
+          <a:xfrm>
+            <a:off x="365760" y="3328416"/>
+            <a:ext cx="73152" cy="777240"/>
+          </a:xfrm>
+          <a:prstGeom prst="rect">
+            <a:avLst/>
+          </a:prstGeom>
+          <a:solidFill>
+            <a:srgbClr val="606EF5"/>
+          </a:solidFill>
+          <a:ln>
+            <a:noFill/>
+          </a:ln>
+          <a:effectLst/>
+        </p:spPr>
+        <p:style>
+          <a:lnRef idx="1">
+            <a:schemeClr val="accent1"/>
+          </a:lnRef>
+          <a:fillRef idx="3">
+            <a:schemeClr val="accent1"/>
+          </a:fillRef>
+          <a:effectRef idx="2">
+            <a:schemeClr val="accent1"/>
+          </a:effectRef>
+          <a:fontRef idx="minor">
+            <a:schemeClr val="lt1"/>
+          </a:fontRef>
+        </p:style>
+        <p:txBody>
+          <a:bodyPr rtlCol="0" anchor="ctr"/>
+          <a:lstStyle/>
+          <a:p>
+            <a:pPr algn="ctr"/>
+            <a:endParaRPr/>
+          </a:p>
+        </p:txBody>
+      </p:sp>
+      <p:sp>
+        <p:nvSpPr>
+          <p:cNvPr id="13" name="TextBox 12"/>
+          <p:cNvSpPr txBox="1"/>
+          <p:nvPr/>
+        </p:nvSpPr>
+        <p:spPr>
+          <a:xfrm>
+            <a:off x="594360" y="3346704"/>
+            <a:ext cx="10972800" cy="365760"/>
+          </a:xfrm>
+          <a:prstGeom prst="rect">
+            <a:avLst/>
+          </a:prstGeom>
+          <a:noFill/>
+        </p:spPr>
+        <p:txBody>
+          <a:bodyPr wrap="square">
+            <a:spAutoFit/>
+          </a:bodyPr>
+          <a:lstStyle/>
+          <a:p>
+            <a:pPr algn="l"/>
+            <a:r>
+              <a:rPr sz="1400" b="1">
+                <a:solidFill>
+                  <a:srgbClr val="606EF5"/>
+                </a:solidFill>
+              </a:rPr>
+              <a:t>🔀  Force a Branch — Deterministic Router Testing</a:t>
+            </a:r>
+          </a:p>
+        </p:txBody>
+      </p:sp>
+      <p:sp>
+        <p:nvSpPr>
+          <p:cNvPr id="14" name="TextBox 13"/>
+          <p:cNvSpPr txBox="1"/>
+          <p:nvPr/>
+        </p:nvSpPr>
+        <p:spPr>
+          <a:xfrm>
+            <a:off x="594360" y="3712527"/>
+            <a:ext cx="11064240" cy="457200"/>
+          </a:xfrm>
+          <a:prstGeom prst="rect">
+            <a:avLst/>
+          </a:prstGeom>
+          <a:noFill/>
+        </p:spPr>
+        <p:txBody>
+          <a:bodyPr wrap="square">
+            <a:spAutoFit/>
+          </a:bodyPr>
+          <a:lstStyle/>
+          <a:p>
+            <a:pPr algn="l"/>
+            <a:r>
+              <a:rPr sz="1100" b="0">
+                <a:solidFill>
+                  <a:srgbClr val="CBD5E1"/>
+                </a:solidFill>
+              </a:rPr>
+              <a:t>The Run modal now shows a “Force branch” dropdown for every router node — pick Critical/Routine (or any labeled edge) to skip the LLM classification and reliably test one specific path, instead of guessing wording that happens to trigger it.</a:t>
+            </a:r>
+          </a:p>
+        </p:txBody>
+      </p:sp>
+      <p:sp>
+        <p:nvSpPr>
+          <p:cNvPr id="15" name="Rectangle 14"/>
+          <p:cNvSpPr/>
+          <p:nvPr/>
+        </p:nvSpPr>
+        <p:spPr>
+          <a:xfrm>
+            <a:off x="365760" y="4224528"/>
+            <a:ext cx="73152" cy="777240"/>
+          </a:xfrm>
+          <a:prstGeom prst="rect">
+            <a:avLst/>
+          </a:prstGeom>
+          <a:solidFill>
+            <a:srgbClr val="606EF5"/>
+          </a:solidFill>
+          <a:ln>
+            <a:noFill/>
+          </a:ln>
+          <a:effectLst/>
+        </p:spPr>
+        <p:style>
+          <a:lnRef idx="1">
+            <a:schemeClr val="accent1"/>
+          </a:lnRef>
+          <a:fillRef idx="3">
+            <a:schemeClr val="accent1"/>
+          </a:fillRef>
+          <a:effectRef idx="2">
+            <a:schemeClr val="accent1"/>
+          </a:effectRef>
+          <a:fontRef idx="minor">
+            <a:schemeClr val="lt1"/>
+          </a:fontRef>
+        </p:style>
+        <p:txBody>
+          <a:bodyPr rtlCol="0" anchor="ctr"/>
+          <a:lstStyle/>
+          <a:p>
+            <a:pPr algn="ctr"/>
+            <a:endParaRPr/>
+          </a:p>
+        </p:txBody>
+      </p:sp>
+      <p:sp>
+        <p:nvSpPr>
+          <p:cNvPr id="16" name="TextBox 15"/>
+          <p:cNvSpPr txBox="1"/>
+          <p:nvPr/>
+        </p:nvSpPr>
+        <p:spPr>
+          <a:xfrm>
+            <a:off x="594360" y="4242816"/>
+            <a:ext cx="10972800" cy="365760"/>
+          </a:xfrm>
+          <a:prstGeom prst="rect">
+            <a:avLst/>
+          </a:prstGeom>
+          <a:noFill/>
+        </p:spPr>
+        <p:txBody>
+          <a:bodyPr wrap="square">
+            <a:spAutoFit/>
+          </a:bodyPr>
+          <a:lstStyle/>
+          <a:p>
+            <a:pPr algn="l"/>
+            <a:r>
+              <a:rPr sz="1400" b="1">
+                <a:solidFill>
+                  <a:srgbClr val="606EF5"/>
+                </a:solidFill>
+              </a:rPr>
+              <a:t>✅  In-Canvas Approve/Reject</a:t>
+            </a:r>
+          </a:p>
+        </p:txBody>
+      </p:sp>
+      <p:sp>
+        <p:nvSpPr>
+          <p:cNvPr id="17" name="TextBox 16"/>
+          <p:cNvSpPr txBox="1"/>
+          <p:nvPr/>
+        </p:nvSpPr>
+        <p:spPr>
+          <a:xfrm>
+            <a:off x="594360" y="4608639"/>
+            <a:ext cx="11064240" cy="457200"/>
+          </a:xfrm>
+          <a:prstGeom prst="rect">
+            <a:avLst/>
+          </a:prstGeom>
+          <a:noFill/>
+        </p:spPr>
+        <p:txBody>
+          <a:bodyPr wrap="square">
+            <a:spAutoFit/>
+          </a:bodyPr>
+          <a:lstStyle/>
+          <a:p>
+            <a:pPr algn="l"/>
+            <a:r>
+              <a:rPr sz="1100" b="0">
+                <a:solidFill>
+                  <a:srgbClr val="CBD5E1"/>
+                </a:solidFill>
+              </a:rPr>
+              <a:t>A paused run now surfaces an inline “Run paused for approval” banner directly in Workflow Builder with Approve/Reject buttons wired to the existing approval endpoints — testers no longer need the emailed link or a separate /approvals/{run_id} page to finish exercising the Critical path.</a:t>
+            </a:r>
+          </a:p>
+        </p:txBody>
+      </p:sp>
+      <p:sp>
+        <p:nvSpPr>
+          <p:cNvPr id="18" name="Rectangle 17"/>
+          <p:cNvSpPr/>
+          <p:nvPr/>
+        </p:nvSpPr>
+        <p:spPr>
+          <a:xfrm>
+            <a:off x="365760" y="5120640"/>
+            <a:ext cx="73152" cy="777240"/>
+          </a:xfrm>
+          <a:prstGeom prst="rect">
+            <a:avLst/>
+          </a:prstGeom>
+          <a:solidFill>
+            <a:srgbClr val="606EF5"/>
+          </a:solidFill>
+          <a:ln>
+            <a:noFill/>
+          </a:ln>
+          <a:effectLst/>
+        </p:spPr>
+        <p:style>
+          <a:lnRef idx="1">
+            <a:schemeClr val="accent1"/>
+          </a:lnRef>
+          <a:fillRef idx="3">
+            <a:schemeClr val="accent1"/>
+          </a:fillRef>
+          <a:effectRef idx="2">
+            <a:schemeClr val="accent1"/>
+          </a:effectRef>
+          <a:fontRef idx="minor">
+            <a:schemeClr val="lt1"/>
+          </a:fontRef>
+        </p:style>
+        <p:txBody>
+          <a:bodyPr rtlCol="0" anchor="ctr"/>
+          <a:lstStyle/>
+          <a:p>
+            <a:pPr algn="ctr"/>
+            <a:endParaRPr/>
+          </a:p>
+        </p:txBody>
+      </p:sp>
+      <p:sp>
+        <p:nvSpPr>
+          <p:cNvPr id="19" name="TextBox 18"/>
+          <p:cNvSpPr txBox="1"/>
+          <p:nvPr/>
+        </p:nvSpPr>
+        <p:spPr>
+          <a:xfrm>
+            <a:off x="594360" y="5138928"/>
+            <a:ext cx="10972800" cy="365760"/>
+          </a:xfrm>
+          <a:prstGeom prst="rect">
+            <a:avLst/>
+          </a:prstGeom>
+          <a:noFill/>
+        </p:spPr>
+        <p:txBody>
+          <a:bodyPr wrap="square">
+            <a:spAutoFit/>
+          </a:bodyPr>
+          <a:lstStyle/>
+          <a:p>
+            <a:pPr algn="l"/>
+            <a:r>
+              <a:rPr sz="1400" b="1">
+                <a:solidFill>
+                  <a:srgbClr val="606EF5"/>
+                </a:solidFill>
+              </a:rPr>
+              <a:t>🎨  Full-Path Visual Completion &amp; Amber Escalation Color</a:t>
+            </a:r>
+          </a:p>
+        </p:txBody>
+      </p:sp>
+      <p:sp>
+        <p:nvSpPr>
+          <p:cNvPr id="20" name="TextBox 19"/>
+          <p:cNvSpPr txBox="1"/>
+          <p:nvPr/>
+        </p:nvSpPr>
+        <p:spPr>
+          <a:xfrm>
+            <a:off x="594360" y="5504751"/>
+            <a:ext cx="11064240" cy="457200"/>
+          </a:xfrm>
+          <a:prstGeom prst="rect">
+            <a:avLst/>
+          </a:prstGeom>
+          <a:noFill/>
+        </p:spPr>
+        <p:txBody>
+          <a:bodyPr wrap="square">
+            <a:spAutoFit/>
+          </a:bodyPr>
+          <a:lstStyle/>
+          <a:p>
+            <a:pPr algn="l"/>
+            <a:r>
+              <a:rPr sz="1100" b="0">
+                <a:solidFill>
+                  <a:srgbClr val="CBD5E1"/>
+                </a:solidFill>
+              </a:rPr>
+              <a:t>Approving a paused run now marks every downstream node and edge as done on the canvas — not just the approval node itself — and the approval role's default color moved from red to amber so a normal paused-for-approval state no longer visually collides with the canvas's “error” red.</a:t>
+            </a:r>
+          </a:p>
+        </p:txBody>
+      </p:sp>
+      <p:sp>
+        <p:nvSpPr>
+          <p:cNvPr id="21" name="TextBox 20"/>
+          <p:cNvSpPr txBox="1"/>
+          <p:nvPr/>
+        </p:nvSpPr>
+        <p:spPr>
+          <a:xfrm>
+            <a:off x="11640312" y="6492240"/>
             <a:ext cx="457200" cy="320040"/>
           </a:xfrm>
           <a:prstGeom prst="rect">
@@ -37575,129 +38220,19 @@
           <a:noFill/>
         </p:spPr>
         <p:txBody>
-          <a:bodyPr wrap="none">
-            <a:spAutoFit/>
-          </a:bodyPr>
-          <a:lstStyle/>
-          <a:p>
-            <a:r>
-              <a:rPr sz="1100">
+          <a:bodyPr wrap="square">
+            <a:spAutoFit/>
+          </a:bodyPr>
+          <a:lstStyle/>
+          <a:p>
+            <a:pPr algn="l"/>
+            <a:r>
+              <a:rPr sz="1100" b="0">
                 <a:solidFill>
                   <a:srgbClr val="CBD5E1"/>
                 </a:solidFill>
               </a:rPr>
-              <a:t>35</a:t>
-            </a:r>
-          </a:p>
-        </p:txBody>
-      </p:sp>
-      <p:pic>
-        <p:nvPicPr>
-          <p:cNvPr id="6" name="Picture 5" descr="02_builder_templates.png"/>
-          <p:cNvPicPr>
-            <a:picLocks noChangeAspect="1"/>
-          </p:cNvPicPr>
-          <p:nvPr/>
-        </p:nvPicPr>
-        <p:blipFill>
-          <a:blip r:embed="rId2"/>
-          <a:stretch>
-            <a:fillRect/>
-          </a:stretch>
-        </p:blipFill>
-        <p:spPr>
-          <a:xfrm>
-            <a:off x="457200" y="1051560"/>
-            <a:ext cx="5486400" cy="3086100"/>
-          </a:xfrm>
-          <a:prstGeom prst="rect">
-            <a:avLst/>
-          </a:prstGeom>
-          <a:ln w="12700">
-            <a:solidFill>
-              <a:srgbClr val="334155"/>
-            </a:solidFill>
-          </a:ln>
-        </p:spPr>
-      </p:pic>
-      <p:pic>
-        <p:nvPicPr>
-          <p:cNvPr id="7" name="Picture 6" descr="03_builder_autobuild.png"/>
-          <p:cNvPicPr>
-            <a:picLocks noChangeAspect="1"/>
-          </p:cNvPicPr>
-          <p:nvPr/>
-        </p:nvPicPr>
-        <p:blipFill>
-          <a:blip r:embed="rId3"/>
-          <a:stretch>
-            <a:fillRect/>
-          </a:stretch>
-        </p:blipFill>
-        <p:spPr>
-          <a:xfrm>
-            <a:off x="6172200" y="1051560"/>
-            <a:ext cx="5486400" cy="3086100"/>
-          </a:xfrm>
-          <a:prstGeom prst="rect">
-            <a:avLst/>
-          </a:prstGeom>
-          <a:ln w="12700">
-            <a:solidFill>
-              <a:srgbClr val="334155"/>
-            </a:solidFill>
-          </a:ln>
-        </p:spPr>
-      </p:pic>
-      <p:sp>
-        <p:nvSpPr>
-          <p:cNvPr id="8" name="TextBox 7"/>
-          <p:cNvSpPr txBox="1"/>
-          <p:nvPr/>
-        </p:nvSpPr>
-        <p:spPr>
-          <a:xfrm>
-            <a:off x="457200" y="5440680"/>
-            <a:ext cx="11247120" cy="1188720"/>
-          </a:xfrm>
-          <a:prstGeom prst="rect">
-            <a:avLst/>
-          </a:prstGeom>
-          <a:noFill/>
-        </p:spPr>
-        <p:txBody>
-          <a:bodyPr wrap="square">
-            <a:spAutoFit/>
-          </a:bodyPr>
-          <a:lstStyle/>
-          <a:p>
-            <a:pPr>
-              <a:spcAft>
-                <a:spcPts val="400"/>
-              </a:spcAft>
-            </a:pPr>
-            <a:r>
-              <a:rPr sz="1100">
-                <a:solidFill>
-                  <a:srgbClr val="CBD5E1"/>
-                </a:solidFill>
-              </a:rPr>
-              <a:t>① Templates — pick from 40+ ready-made multi-agent pipelines across 10 categories (Architecture, Sales &amp; Marketing, Customer Support, and more) and load one straight onto the canvas.</a:t>
-            </a:r>
-          </a:p>
-          <a:p>
-            <a:pPr>
-              <a:spcAft>
-                <a:spcPts val="400"/>
-              </a:spcAft>
-            </a:pPr>
-            <a:r>
-              <a:rPr sz="1100">
-                <a:solidFill>
-                  <a:srgbClr val="CBD5E1"/>
-                </a:solidFill>
-              </a:rPr>
-              <a:t>② Auto-Build — describe your pipeline in plain English (“A customer support pipeline that classifies queries, routes to the right responder...”) and GPT-5.4-mini generates a 3–6 role-typed node graph automatically.</a:t>
+              <a:t>34a</a:t>
             </a:r>
           </a:p>
         </p:txBody>
@@ -37845,7 +38380,7 @@
                   <a:srgbClr val="FFFFFF"/>
                 </a:solidFill>
               </a:rPr>
-              <a:t>How To Use: Visual Builder — Configure, Export &amp; Import</a:t>
+              <a:t>How To Use: Visual Builder — Templates &amp; Auto-Build</a:t>
             </a:r>
           </a:p>
         </p:txBody>
@@ -37878,14 +38413,14 @@
                   <a:srgbClr val="CBD5E1"/>
                 </a:solidFill>
               </a:rPr>
-              <a:t>36</a:t>
+              <a:t>35</a:t>
             </a:r>
           </a:p>
         </p:txBody>
       </p:sp>
       <p:pic>
         <p:nvPicPr>
-          <p:cNvPr id="6" name="Picture 5" descr="04_builder_agent_config.png"/>
+          <p:cNvPr id="6" name="Picture 5" descr="02_builder_templates.png"/>
           <p:cNvPicPr>
             <a:picLocks noChangeAspect="1"/>
           </p:cNvPicPr>
@@ -37914,7 +38449,7 @@
       </p:pic>
       <p:pic>
         <p:nvPicPr>
-          <p:cNvPr id="7" name="Picture 6" descr="05_builder_export_code.png"/>
+          <p:cNvPr id="7" name="Picture 6" descr="03_builder_autobuild.png"/>
           <p:cNvPicPr>
             <a:picLocks noChangeAspect="1"/>
           </p:cNvPicPr>
@@ -37974,7 +38509,7 @@
                   <a:srgbClr val="CBD5E1"/>
                 </a:solidFill>
               </a:rPr>
-              <a:t>① Configure — click any node to set its Role, System Prompt, Model (Local Model or Azure GPT-5.4-mini, per agent), Tools, and always-on Guardrails, then Save Agent.</a:t>
+              <a:t>① Templates — pick from 40+ ready-made multi-agent pipelines across 10 categories (Architecture, Sales &amp; Marketing, Customer Support, and more) and load one straight onto the canvas.</a:t>
             </a:r>
           </a:p>
           <a:p>
@@ -37989,7 +38524,7 @@
                   <a:srgbClr val="CBD5E1"/>
                 </a:solidFill>
               </a:rPr>
-              <a:t>② Export / Import — Export Code generates a faithful Python script with the same execution logic as the live engine; Export JSON / Import JSON give a lossless, round-trippable workflow backup.</a:t>
+              <a:t>② Auto-Build — describe your pipeline in plain English (“A customer support pipeline that classifies queries, routes to the right responder...”) and GPT-5.4-mini generates a 3–6 role-typed node graph automatically.</a:t>
             </a:r>
           </a:p>
         </p:txBody>
@@ -38137,7 +38672,7 @@
                   <a:srgbClr val="FFFFFF"/>
                 </a:solidFill>
               </a:rPr>
-              <a:t>How To Use: Visual Builder — Run &amp; Deploy</a:t>
+              <a:t>How To Use: Visual Builder — Configure, Export &amp; Import</a:t>
             </a:r>
           </a:p>
         </p:txBody>
@@ -38170,14 +38705,14 @@
                   <a:srgbClr val="CBD5E1"/>
                 </a:solidFill>
               </a:rPr>
-              <a:t>37</a:t>
+              <a:t>36</a:t>
             </a:r>
           </a:p>
         </p:txBody>
       </p:sp>
       <p:pic>
         <p:nvPicPr>
-          <p:cNvPr id="6" name="Picture 5" descr="06_builder_run_dialog.png"/>
+          <p:cNvPr id="6" name="Picture 5" descr="04_builder_agent_config.png"/>
           <p:cNvPicPr>
             <a:picLocks noChangeAspect="1"/>
           </p:cNvPicPr>
@@ -38191,8 +38726,8 @@
         </p:blipFill>
         <p:spPr>
           <a:xfrm>
-            <a:off x="2651760" y="1051560"/>
-            <a:ext cx="6858000" cy="3857625"/>
+            <a:off x="457200" y="1051560"/>
+            <a:ext cx="5486400" cy="3086100"/>
           </a:xfrm>
           <a:prstGeom prst="rect">
             <a:avLst/>
@@ -38204,9 +38739,38 @@
           </a:ln>
         </p:spPr>
       </p:pic>
-      <p:sp>
-        <p:nvSpPr>
-          <p:cNvPr id="7" name="TextBox 6"/>
+      <p:pic>
+        <p:nvPicPr>
+          <p:cNvPr id="7" name="Picture 6" descr="05_builder_export_code.png"/>
+          <p:cNvPicPr>
+            <a:picLocks noChangeAspect="1"/>
+          </p:cNvPicPr>
+          <p:nvPr/>
+        </p:nvPicPr>
+        <p:blipFill>
+          <a:blip r:embed="rId3"/>
+          <a:stretch>
+            <a:fillRect/>
+          </a:stretch>
+        </p:blipFill>
+        <p:spPr>
+          <a:xfrm>
+            <a:off x="6172200" y="1051560"/>
+            <a:ext cx="5486400" cy="3086100"/>
+          </a:xfrm>
+          <a:prstGeom prst="rect">
+            <a:avLst/>
+          </a:prstGeom>
+          <a:ln w="12700">
+            <a:solidFill>
+              <a:srgbClr val="334155"/>
+            </a:solidFill>
+          </a:ln>
+        </p:spPr>
+      </p:pic>
+      <p:sp>
+        <p:nvSpPr>
+          <p:cNvPr id="8" name="TextBox 7"/>
           <p:cNvSpPr txBox="1"/>
           <p:nvPr/>
         </p:nvSpPr>
@@ -38237,7 +38801,7 @@
                   <a:srgbClr val="CBD5E1"/>
                 </a:solidFill>
               </a:rPr>
-              <a:t>① Run — click Run, and an AI-suggested realistic example input is generated automatically; edit it or keep it, then Execute &amp; Save Trace to watch each node pulse green while running and stay green when done.</a:t>
+              <a:t>① Configure — click any node to set its Role, System Prompt, Model (Local Model or Azure GPT-5.4-mini, per agent), Tools, and always-on Guardrails, then Save Agent.</a:t>
             </a:r>
           </a:p>
           <a:p>
@@ -38252,7 +38816,7 @@
                   <a:srgbClr val="CBD5E1"/>
                 </a:solidFill>
               </a:rPr>
-              <a:t>② Deploy — publish the workflow as a live, callable endpoint once you're happy with a run's trace in Workflow Runs / Observability.</a:t>
+              <a:t>② Export / Import — Export Code generates a faithful Python script with the same execution logic as the live engine; Export JSON / Import JSON give a lossless, round-trippable workflow backup.</a:t>
             </a:r>
           </a:p>
         </p:txBody>
@@ -38400,7 +38964,7 @@
                   <a:srgbClr val="FFFFFF"/>
                 </a:solidFill>
               </a:rPr>
-              <a:t>How To Use: Architect, Agent Studio &amp; Playground</a:t>
+              <a:t>How To Use: Visual Builder — Run &amp; Deploy</a:t>
             </a:r>
           </a:p>
         </p:txBody>
@@ -38433,14 +38997,14 @@
                   <a:srgbClr val="CBD5E1"/>
                 </a:solidFill>
               </a:rPr>
-              <a:t>38</a:t>
+              <a:t>37</a:t>
             </a:r>
           </a:p>
         </p:txBody>
       </p:sp>
       <p:pic>
         <p:nvPicPr>
-          <p:cNvPr id="7" name="Picture 6" descr="08_agent_studio.png"/>
+          <p:cNvPr id="6" name="Picture 5" descr="06_builder_run_dialog.png"/>
           <p:cNvPicPr>
             <a:picLocks noChangeAspect="1"/>
           </p:cNvPicPr>
@@ -38454,8 +39018,8 @@
         </p:blipFill>
         <p:spPr>
           <a:xfrm>
-            <a:off x="6172200" y="1051560"/>
-            <a:ext cx="5486400" cy="3086100"/>
+            <a:off x="2651760" y="1051560"/>
+            <a:ext cx="6858000" cy="3857625"/>
           </a:xfrm>
           <a:prstGeom prst="rect">
             <a:avLst/>
@@ -38469,14 +39033,14 @@
       </p:pic>
       <p:sp>
         <p:nvSpPr>
-          <p:cNvPr id="8" name="TextBox 7"/>
+          <p:cNvPr id="7" name="TextBox 6"/>
           <p:cNvSpPr txBox="1"/>
           <p:nvPr/>
         </p:nvSpPr>
         <p:spPr>
           <a:xfrm>
             <a:off x="457200" y="5440680"/>
-            <a:ext cx="11247120" cy="651460"/>
+            <a:ext cx="11247120" cy="1188720"/>
           </a:xfrm>
           <a:prstGeom prst="rect">
             <a:avLst/>
@@ -38495,12 +39059,12 @@
               </a:spcAft>
             </a:pPr>
             <a:r>
-              <a:rPr lang="en-US" sz="1100" dirty="0">
+              <a:rPr sz="1100">
                 <a:solidFill>
                   <a:srgbClr val="CBD5E1"/>
                 </a:solidFill>
               </a:rPr>
-              <a:t>① Home — landing page with quick actions and recent activity; the fastest way back into any agent, project, or workflow you were last working on. </a:t>
+              <a:t>① Run — click Run, and an AI-suggested realistic example input is generated automatically; edit it or keep it, then Execute &amp; Save Trace to watch each node pulse green while running and stay green when done.</a:t>
             </a:r>
           </a:p>
           <a:p>
@@ -38510,51 +39074,16 @@
               </a:spcAft>
             </a:pPr>
             <a:r>
-              <a:rPr sz="1100" dirty="0">
+              <a:rPr sz="1100">
                 <a:solidFill>
                   <a:srgbClr val="CBD5E1"/>
                 </a:solidFill>
               </a:rPr>
-              <a:t>② Agent Studio — every saved agent lives here: Edit, Test, Deploy, Publish, or ask it something directly. Playground gives each agent its own chat with a one-click “Suggest” example-input button.</a:t>
-            </a:r>
-          </a:p>
-        </p:txBody>
-      </p:sp>
-      <p:pic>
-        <p:nvPicPr>
-          <p:cNvPr id="10" name="Picture 9" descr="11_home.png">
-            <a:extLst>
-              <a:ext uri="{FF2B5EF4-FFF2-40B4-BE49-F238E27FC236}">
-                <a16:creationId xmlns:a16="http://schemas.microsoft.com/office/drawing/2014/main" id="{961B9171-039C-BA53-D873-0BDC693AF21D}"/>
-              </a:ext>
-            </a:extLst>
-          </p:cNvPr>
-          <p:cNvPicPr>
-            <a:picLocks noChangeAspect="1"/>
-          </p:cNvPicPr>
-          <p:nvPr/>
-        </p:nvPicPr>
-        <p:blipFill>
-          <a:blip r:embed="rId3"/>
-          <a:stretch>
-            <a:fillRect/>
-          </a:stretch>
-        </p:blipFill>
-        <p:spPr>
-          <a:xfrm>
-            <a:off x="457200" y="1051560"/>
-            <a:ext cx="5486400" cy="3086100"/>
-          </a:xfrm>
-          <a:prstGeom prst="rect">
-            <a:avLst/>
-          </a:prstGeom>
-          <a:ln w="12700">
-            <a:solidFill>
-              <a:srgbClr val="334155"/>
-            </a:solidFill>
-          </a:ln>
-        </p:spPr>
-      </p:pic>
+              <a:t>② Deploy — publish the workflow as a live, callable endpoint once you're happy with a run's trace in Workflow Runs / Observability.</a:t>
+            </a:r>
+          </a:p>
+        </p:txBody>
+      </p:sp>
     </p:spTree>
   </p:cSld>
   <p:clrMapOvr>
@@ -38698,7 +39227,7 @@
                   <a:srgbClr val="FFFFFF"/>
                 </a:solidFill>
               </a:rPr>
-              <a:t>How To Use: Playground — Test Any Agent Live</a:t>
+              <a:t>How To Use: Architect, Agent Studio &amp; Playground</a:t>
             </a:r>
           </a:p>
         </p:txBody>
@@ -38731,67 +39260,14 @@
                   <a:srgbClr val="CBD5E1"/>
                 </a:solidFill>
               </a:rPr>
-              <a:t>39</a:t>
-            </a:r>
-          </a:p>
-        </p:txBody>
-      </p:sp>
-      <p:sp>
-        <p:nvSpPr>
-          <p:cNvPr id="7" name="TextBox 6"/>
-          <p:cNvSpPr txBox="1"/>
-          <p:nvPr/>
-        </p:nvSpPr>
-        <p:spPr>
-          <a:xfrm>
-            <a:off x="457200" y="5440680"/>
-            <a:ext cx="11247120" cy="1188720"/>
-          </a:xfrm>
-          <a:prstGeom prst="rect">
-            <a:avLst/>
-          </a:prstGeom>
-          <a:noFill/>
-        </p:spPr>
-        <p:txBody>
-          <a:bodyPr wrap="square">
-            <a:spAutoFit/>
-          </a:bodyPr>
-          <a:lstStyle/>
-          <a:p>
-            <a:pPr>
-              <a:spcAft>
-                <a:spcPts val="400"/>
-              </a:spcAft>
-            </a:pPr>
-            <a:r>
-              <a:rPr sz="1100">
-                <a:solidFill>
-                  <a:srgbClr val="CBD5E1"/>
-                </a:solidFill>
-              </a:rPr>
-              <a:t>① Open any agent's Playground to see its System Prompt, Guardrails, Tools, and the exact Model it runs on (accurately resolved per agent — Local Model or Azure GPT-5.4-mini, not a stale label).</a:t>
-            </a:r>
-          </a:p>
-          <a:p>
-            <a:pPr>
-              <a:spcAft>
-                <a:spcPts val="400"/>
-              </a:spcAft>
-            </a:pPr>
-            <a:r>
-              <a:rPr sz="1100">
-                <a:solidFill>
-                  <a:srgbClr val="CBD5E1"/>
-                </a:solidFill>
-              </a:rPr>
-              <a:t>② Click Suggest for an AI-generated realistic example message tailored to that agent, or type your own — then Send to test it live and watch Session Stats (Total Runs, Avg ms) update.</a:t>
+              <a:t>38</a:t>
             </a:r>
           </a:p>
         </p:txBody>
       </p:sp>
       <p:pic>
         <p:nvPicPr>
-          <p:cNvPr id="8" name="Picture 7" descr="10_playground_suggest.png"/>
+          <p:cNvPr id="7" name="Picture 6" descr="08_agent_studio.png"/>
           <p:cNvPicPr>
             <a:picLocks noChangeAspect="1"/>
           </p:cNvPicPr>
@@ -38805,8 +39281,96 @@
         </p:blipFill>
         <p:spPr>
           <a:xfrm>
-            <a:off x="2651760" y="1051560"/>
-            <a:ext cx="6858000" cy="3857625"/>
+            <a:off x="6172200" y="1051560"/>
+            <a:ext cx="5486400" cy="3086100"/>
+          </a:xfrm>
+          <a:prstGeom prst="rect">
+            <a:avLst/>
+          </a:prstGeom>
+          <a:ln w="12700">
+            <a:solidFill>
+              <a:srgbClr val="334155"/>
+            </a:solidFill>
+          </a:ln>
+        </p:spPr>
+      </p:pic>
+      <p:sp>
+        <p:nvSpPr>
+          <p:cNvPr id="8" name="TextBox 7"/>
+          <p:cNvSpPr txBox="1"/>
+          <p:nvPr/>
+        </p:nvSpPr>
+        <p:spPr>
+          <a:xfrm>
+            <a:off x="457200" y="5440680"/>
+            <a:ext cx="11247120" cy="651460"/>
+          </a:xfrm>
+          <a:prstGeom prst="rect">
+            <a:avLst/>
+          </a:prstGeom>
+          <a:noFill/>
+        </p:spPr>
+        <p:txBody>
+          <a:bodyPr wrap="square">
+            <a:spAutoFit/>
+          </a:bodyPr>
+          <a:lstStyle/>
+          <a:p>
+            <a:pPr>
+              <a:spcAft>
+                <a:spcPts val="400"/>
+              </a:spcAft>
+            </a:pPr>
+            <a:r>
+              <a:rPr lang="en-US" sz="1100" dirty="0">
+                <a:solidFill>
+                  <a:srgbClr val="CBD5E1"/>
+                </a:solidFill>
+              </a:rPr>
+              <a:t>① Home — landing page with quick actions and recent activity; the fastest way back into any agent, project, or workflow you were last working on. </a:t>
+            </a:r>
+          </a:p>
+          <a:p>
+            <a:pPr>
+              <a:spcAft>
+                <a:spcPts val="400"/>
+              </a:spcAft>
+            </a:pPr>
+            <a:r>
+              <a:rPr sz="1100" dirty="0">
+                <a:solidFill>
+                  <a:srgbClr val="CBD5E1"/>
+                </a:solidFill>
+              </a:rPr>
+              <a:t>② Agent Studio — every saved agent lives here: Edit, Test, Deploy, Publish, or ask it something directly. Playground gives each agent its own chat with a one-click “Suggest” example-input button.</a:t>
+            </a:r>
+          </a:p>
+        </p:txBody>
+      </p:sp>
+      <p:pic>
+        <p:nvPicPr>
+          <p:cNvPr id="10" name="Picture 9" descr="11_home.png">
+            <a:extLst>
+              <a:ext uri="{FF2B5EF4-FFF2-40B4-BE49-F238E27FC236}">
+                <a16:creationId xmlns:a16="http://schemas.microsoft.com/office/drawing/2014/main" id="{961B9171-039C-BA53-D873-0BDC693AF21D}"/>
+              </a:ext>
+            </a:extLst>
+          </p:cNvPr>
+          <p:cNvPicPr>
+            <a:picLocks noChangeAspect="1"/>
+          </p:cNvPicPr>
+          <p:nvPr/>
+        </p:nvPicPr>
+        <p:blipFill>
+          <a:blip r:embed="rId3"/>
+          <a:stretch>
+            <a:fillRect/>
+          </a:stretch>
+        </p:blipFill>
+        <p:spPr>
+          <a:xfrm>
+            <a:off x="457200" y="1051560"/>
+            <a:ext cx="5486400" cy="3086100"/>
           </a:xfrm>
           <a:prstGeom prst="rect">
             <a:avLst/>
@@ -39919,42 +40483,26 @@
         <p:spPr>
           <a:xfrm>
             <a:off x="457200" y="274320"/>
-            <a:ext cx="10972800" cy="492443"/>
-          </a:xfrm>
-          <a:prstGeom prst="rect">
-            <a:avLst/>
-          </a:prstGeom>
-          <a:noFill/>
-        </p:spPr>
-        <p:txBody>
-          <a:bodyPr wrap="square">
-            <a:spAutoFit/>
-          </a:bodyPr>
-          <a:lstStyle/>
-          <a:p>
-            <a:r>
-              <a:rPr sz="2600" b="1" dirty="0">
+            <a:ext cx="10972800" cy="548640"/>
+          </a:xfrm>
+          <a:prstGeom prst="rect">
+            <a:avLst/>
+          </a:prstGeom>
+          <a:noFill/>
+        </p:spPr>
+        <p:txBody>
+          <a:bodyPr wrap="square">
+            <a:spAutoFit/>
+          </a:bodyPr>
+          <a:lstStyle/>
+          <a:p>
+            <a:r>
+              <a:rPr sz="2600" b="1">
                 <a:solidFill>
                   <a:srgbClr val="FFFFFF"/>
                 </a:solidFill>
               </a:rPr>
-              <a:t>How To Use: </a:t>
-            </a:r>
-            <a:r>
-              <a:rPr lang="en-US" sz="2600" b="1" dirty="0">
-                <a:solidFill>
-                  <a:srgbClr val="FFFFFF"/>
-                </a:solidFill>
-              </a:rPr>
-              <a:t>Architect</a:t>
-            </a:r>
-            <a:r>
-              <a:rPr sz="2600" b="1" dirty="0">
-                <a:solidFill>
-                  <a:srgbClr val="FFFFFF"/>
-                </a:solidFill>
-              </a:rPr>
-              <a:t> &amp; Prompt Library</a:t>
+              <a:t>How To Use: Playground — Test Any Agent Live</a:t>
             </a:r>
           </a:p>
         </p:txBody>
@@ -39987,14 +40535,67 @@
                   <a:srgbClr val="CBD5E1"/>
                 </a:solidFill>
               </a:rPr>
-              <a:t>40</a:t>
+              <a:t>39</a:t>
+            </a:r>
+          </a:p>
+        </p:txBody>
+      </p:sp>
+      <p:sp>
+        <p:nvSpPr>
+          <p:cNvPr id="7" name="TextBox 6"/>
+          <p:cNvSpPr txBox="1"/>
+          <p:nvPr/>
+        </p:nvSpPr>
+        <p:spPr>
+          <a:xfrm>
+            <a:off x="457200" y="5440680"/>
+            <a:ext cx="11247120" cy="1188720"/>
+          </a:xfrm>
+          <a:prstGeom prst="rect">
+            <a:avLst/>
+          </a:prstGeom>
+          <a:noFill/>
+        </p:spPr>
+        <p:txBody>
+          <a:bodyPr wrap="square">
+            <a:spAutoFit/>
+          </a:bodyPr>
+          <a:lstStyle/>
+          <a:p>
+            <a:pPr>
+              <a:spcAft>
+                <a:spcPts val="400"/>
+              </a:spcAft>
+            </a:pPr>
+            <a:r>
+              <a:rPr sz="1100">
+                <a:solidFill>
+                  <a:srgbClr val="CBD5E1"/>
+                </a:solidFill>
+              </a:rPr>
+              <a:t>① Open any agent's Playground to see its System Prompt, Guardrails, Tools, and the exact Model it runs on (accurately resolved per agent — Local Model or Azure GPT-5.4-mini, not a stale label).</a:t>
+            </a:r>
+          </a:p>
+          <a:p>
+            <a:pPr>
+              <a:spcAft>
+                <a:spcPts val="400"/>
+              </a:spcAft>
+            </a:pPr>
+            <a:r>
+              <a:rPr sz="1100">
+                <a:solidFill>
+                  <a:srgbClr val="CBD5E1"/>
+                </a:solidFill>
+              </a:rPr>
+              <a:t>② Click Suggest for an AI-generated realistic example message tailored to that agent, or type your own — then Send to test it live and watch Session Stats (Total Runs, Avg ms) update.</a:t>
             </a:r>
           </a:p>
         </p:txBody>
       </p:sp>
       <p:pic>
         <p:nvPicPr>
-          <p:cNvPr id="7" name="Picture 6" descr="12_prompt_library.png"/>
+          <p:cNvPr id="8" name="Picture 7" descr="10_playground_suggest.png"/>
           <p:cNvPicPr>
             <a:picLocks noChangeAspect="1"/>
           </p:cNvPicPr>
@@ -40008,108 +40609,8 @@
         </p:blipFill>
         <p:spPr>
           <a:xfrm>
-            <a:off x="6172200" y="1051560"/>
-            <a:ext cx="5486400" cy="3086100"/>
-          </a:xfrm>
-          <a:prstGeom prst="rect">
-            <a:avLst/>
-          </a:prstGeom>
-          <a:ln w="12700">
-            <a:solidFill>
-              <a:srgbClr val="334155"/>
-            </a:solidFill>
-          </a:ln>
-        </p:spPr>
-      </p:pic>
-      <p:sp>
-        <p:nvSpPr>
-          <p:cNvPr id="8" name="TextBox 7"/>
-          <p:cNvSpPr txBox="1"/>
-          <p:nvPr/>
-        </p:nvSpPr>
-        <p:spPr>
-          <a:xfrm>
-            <a:off x="457200" y="5440680"/>
-            <a:ext cx="11247120" cy="872034"/>
-          </a:xfrm>
-          <a:prstGeom prst="rect">
-            <a:avLst/>
-          </a:prstGeom>
-          <a:noFill/>
-        </p:spPr>
-        <p:txBody>
-          <a:bodyPr wrap="square">
-            <a:spAutoFit/>
-          </a:bodyPr>
-          <a:lstStyle/>
-          <a:p>
-            <a:pPr>
-              <a:spcAft>
-                <a:spcPts val="400"/>
-              </a:spcAft>
-            </a:pPr>
-            <a:r>
-              <a:rPr lang="en-US" sz="1100" dirty="0">
-                <a:solidFill>
-                  <a:srgbClr val="CBD5E1"/>
-                </a:solidFill>
-              </a:rPr>
-              <a:t>① Architect — describe what you want to build in plain English; it asks clarifying questions, then generates a full Plan / Agents / App / Database, downloadable as a RAG Scaffold or Custom Code ZIP.</a:t>
-            </a:r>
-          </a:p>
-          <a:p>
-            <a:pPr>
-              <a:spcAft>
-                <a:spcPts val="400"/>
-              </a:spcAft>
-            </a:pPr>
-            <a:endParaRPr sz="1100" dirty="0">
-              <a:solidFill>
-                <a:srgbClr val="CBD5E1"/>
-              </a:solidFill>
-            </a:endParaRPr>
-          </a:p>
-          <a:p>
-            <a:pPr>
-              <a:spcAft>
-                <a:spcPts val="400"/>
-              </a:spcAft>
-            </a:pPr>
-            <a:r>
-              <a:rPr sz="1100" dirty="0">
-                <a:solidFill>
-                  <a:srgbClr val="CBD5E1"/>
-                </a:solidFill>
-              </a:rPr>
-              <a:t>② Prompt Library — 46+ curated multi-agent prompts across 10 domains (Support, Sales, Legal, HR, Data, and more); search, preview, and copy straight into Architect or Agent Studio.</a:t>
-            </a:r>
-          </a:p>
-        </p:txBody>
-      </p:sp>
-      <p:pic>
-        <p:nvPicPr>
-          <p:cNvPr id="10" name="Picture 9" descr="07_architect.png">
-            <a:extLst>
-              <a:ext uri="{FF2B5EF4-FFF2-40B4-BE49-F238E27FC236}">
-                <a16:creationId xmlns:a16="http://schemas.microsoft.com/office/drawing/2014/main" id="{A6EA2B05-A44A-923C-6A12-9B1083B342D1}"/>
-              </a:ext>
-            </a:extLst>
-          </p:cNvPr>
-          <p:cNvPicPr>
-            <a:picLocks noChangeAspect="1"/>
-          </p:cNvPicPr>
-          <p:nvPr/>
-        </p:nvPicPr>
-        <p:blipFill>
-          <a:blip r:embed="rId3"/>
-          <a:stretch>
-            <a:fillRect/>
-          </a:stretch>
-        </p:blipFill>
-        <p:spPr>
-          <a:xfrm>
-            <a:off x="457200" y="1051560"/>
-            <a:ext cx="5486400" cy="3086100"/>
+            <a:off x="2651760" y="1051560"/>
+            <a:ext cx="6858000" cy="3857625"/>
           </a:xfrm>
           <a:prstGeom prst="rect">
             <a:avLst/>
@@ -40245,26 +40746,42 @@
         <p:spPr>
           <a:xfrm>
             <a:off x="457200" y="274320"/>
-            <a:ext cx="10972800" cy="548640"/>
-          </a:xfrm>
-          <a:prstGeom prst="rect">
-            <a:avLst/>
-          </a:prstGeom>
-          <a:noFill/>
-        </p:spPr>
-        <p:txBody>
-          <a:bodyPr wrap="square">
-            <a:spAutoFit/>
-          </a:bodyPr>
-          <a:lstStyle/>
-          <a:p>
-            <a:r>
-              <a:rPr sz="2600" b="1">
+            <a:ext cx="10972800" cy="492443"/>
+          </a:xfrm>
+          <a:prstGeom prst="rect">
+            <a:avLst/>
+          </a:prstGeom>
+          <a:noFill/>
+        </p:spPr>
+        <p:txBody>
+          <a:bodyPr wrap="square">
+            <a:spAutoFit/>
+          </a:bodyPr>
+          <a:lstStyle/>
+          <a:p>
+            <a:r>
+              <a:rPr sz="2600" b="1" dirty="0">
                 <a:solidFill>
                   <a:srgbClr val="FFFFFF"/>
                 </a:solidFill>
               </a:rPr>
-              <a:t>How To Use: Control Plane &amp; Audit Traceability</a:t>
+              <a:t>How To Use: </a:t>
+            </a:r>
+            <a:r>
+              <a:rPr lang="en-US" sz="2600" b="1" dirty="0">
+                <a:solidFill>
+                  <a:srgbClr val="FFFFFF"/>
+                </a:solidFill>
+              </a:rPr>
+              <a:t>Architect</a:t>
+            </a:r>
+            <a:r>
+              <a:rPr sz="2600" b="1" dirty="0">
+                <a:solidFill>
+                  <a:srgbClr val="FFFFFF"/>
+                </a:solidFill>
+              </a:rPr>
+              <a:t> &amp; Prompt Library</a:t>
             </a:r>
           </a:p>
         </p:txBody>
@@ -40297,14 +40814,14 @@
                   <a:srgbClr val="CBD5E1"/>
                 </a:solidFill>
               </a:rPr>
-              <a:t>41</a:t>
+              <a:t>40</a:t>
             </a:r>
           </a:p>
         </p:txBody>
       </p:sp>
       <p:pic>
         <p:nvPicPr>
-          <p:cNvPr id="6" name="Picture 5" descr="13_control_plane.png"/>
+          <p:cNvPr id="7" name="Picture 6" descr="12_prompt_library.png"/>
           <p:cNvPicPr>
             <a:picLocks noChangeAspect="1"/>
           </p:cNvPicPr>
@@ -40318,7 +40835,7 @@
         </p:blipFill>
         <p:spPr>
           <a:xfrm>
-            <a:off x="457200" y="1051560"/>
+            <a:off x="6172200" y="1051560"/>
             <a:ext cx="5486400" cy="3086100"/>
           </a:xfrm>
           <a:prstGeom prst="rect">
@@ -40331,9 +40848,80 @@
           </a:ln>
         </p:spPr>
       </p:pic>
+      <p:sp>
+        <p:nvSpPr>
+          <p:cNvPr id="8" name="TextBox 7"/>
+          <p:cNvSpPr txBox="1"/>
+          <p:nvPr/>
+        </p:nvSpPr>
+        <p:spPr>
+          <a:xfrm>
+            <a:off x="457200" y="5440680"/>
+            <a:ext cx="11247120" cy="872034"/>
+          </a:xfrm>
+          <a:prstGeom prst="rect">
+            <a:avLst/>
+          </a:prstGeom>
+          <a:noFill/>
+        </p:spPr>
+        <p:txBody>
+          <a:bodyPr wrap="square">
+            <a:spAutoFit/>
+          </a:bodyPr>
+          <a:lstStyle/>
+          <a:p>
+            <a:pPr>
+              <a:spcAft>
+                <a:spcPts val="400"/>
+              </a:spcAft>
+            </a:pPr>
+            <a:r>
+              <a:rPr lang="en-US" sz="1100" dirty="0">
+                <a:solidFill>
+                  <a:srgbClr val="CBD5E1"/>
+                </a:solidFill>
+              </a:rPr>
+              <a:t>① Architect — describe what you want to build in plain English; it asks clarifying questions, then generates a full Plan / Agents / App / Database, downloadable as a RAG Scaffold or Custom Code ZIP.</a:t>
+            </a:r>
+          </a:p>
+          <a:p>
+            <a:pPr>
+              <a:spcAft>
+                <a:spcPts val="400"/>
+              </a:spcAft>
+            </a:pPr>
+            <a:endParaRPr sz="1100" dirty="0">
+              <a:solidFill>
+                <a:srgbClr val="CBD5E1"/>
+              </a:solidFill>
+            </a:endParaRPr>
+          </a:p>
+          <a:p>
+            <a:pPr>
+              <a:spcAft>
+                <a:spcPts val="400"/>
+              </a:spcAft>
+            </a:pPr>
+            <a:r>
+              <a:rPr sz="1100" dirty="0">
+                <a:solidFill>
+                  <a:srgbClr val="CBD5E1"/>
+                </a:solidFill>
+              </a:rPr>
+              <a:t>② Prompt Library — 46+ curated multi-agent prompts across 10 domains (Support, Sales, Legal, HR, Data, and more); search, preview, and copy straight into Architect or Agent Studio.</a:t>
+            </a:r>
+          </a:p>
+        </p:txBody>
+      </p:sp>
       <p:pic>
         <p:nvPicPr>
-          <p:cNvPr id="7" name="Picture 6" descr="14_usage_audit.png"/>
+          <p:cNvPr id="10" name="Picture 9" descr="07_architect.png">
+            <a:extLst>
+              <a:ext uri="{FF2B5EF4-FFF2-40B4-BE49-F238E27FC236}">
+                <a16:creationId xmlns:a16="http://schemas.microsoft.com/office/drawing/2014/main" id="{A6EA2B05-A44A-923C-6A12-9B1083B342D1}"/>
+              </a:ext>
+            </a:extLst>
+          </p:cNvPr>
           <p:cNvPicPr>
             <a:picLocks noChangeAspect="1"/>
           </p:cNvPicPr>
@@ -40347,7 +40935,7 @@
         </p:blipFill>
         <p:spPr>
           <a:xfrm>
-            <a:off x="6172200" y="1051560"/>
+            <a:off x="457200" y="1051560"/>
             <a:ext cx="5486400" cy="3086100"/>
           </a:xfrm>
           <a:prstGeom prst="rect">
@@ -40360,59 +40948,6 @@
           </a:ln>
         </p:spPr>
       </p:pic>
-      <p:sp>
-        <p:nvSpPr>
-          <p:cNvPr id="8" name="TextBox 7"/>
-          <p:cNvSpPr txBox="1"/>
-          <p:nvPr/>
-        </p:nvSpPr>
-        <p:spPr>
-          <a:xfrm>
-            <a:off x="457200" y="5440680"/>
-            <a:ext cx="11247120" cy="1188720"/>
-          </a:xfrm>
-          <a:prstGeom prst="rect">
-            <a:avLst/>
-          </a:prstGeom>
-          <a:noFill/>
-        </p:spPr>
-        <p:txBody>
-          <a:bodyPr wrap="square">
-            <a:spAutoFit/>
-          </a:bodyPr>
-          <a:lstStyle/>
-          <a:p>
-            <a:pPr>
-              <a:spcAft>
-                <a:spcPts val="400"/>
-              </a:spcAft>
-            </a:pPr>
-            <a:r>
-              <a:rPr sz="1100">
-                <a:solidFill>
-                  <a:srgbClr val="CBD5E1"/>
-                </a:solidFill>
-              </a:rPr>
-              <a:t>① Control Plane — live platform health: active agents, runs, guardrail triggers, and average latency in one dashboard, refreshed in real time.</a:t>
-            </a:r>
-          </a:p>
-          <a:p>
-            <a:pPr>
-              <a:spcAft>
-                <a:spcPts val="400"/>
-              </a:spcAft>
-            </a:pPr>
-            <a:r>
-              <a:rPr sz="1100">
-                <a:solidFill>
-                  <a:srgbClr val="CBD5E1"/>
-                </a:solidFill>
-              </a:rPr>
-              <a:t>② Usage &amp; Traceability — full audit-log viewer: every agent action with user, resource, input/output snapshot, guardrail trigger, latency, and trace ID, filterable by action/agent/date.</a:t>
-            </a:r>
-          </a:p>
-        </p:txBody>
-      </p:sp>
     </p:spTree>
   </p:cSld>
   <p:clrMapOvr>
@@ -40556,7 +41091,7 @@
                   <a:srgbClr val="FFFFFF"/>
                 </a:solidFill>
               </a:rPr>
-              <a:t>How To Use: Workflow Observability — Tracing &amp; Logs</a:t>
+              <a:t>How To Use: Control Plane &amp; Audit Traceability</a:t>
             </a:r>
           </a:p>
         </p:txBody>
@@ -40589,14 +41124,14 @@
                   <a:srgbClr val="CBD5E1"/>
                 </a:solidFill>
               </a:rPr>
-              <a:t>42</a:t>
+              <a:t>41</a:t>
             </a:r>
           </a:p>
         </p:txBody>
       </p:sp>
       <p:pic>
         <p:nvPicPr>
-          <p:cNvPr id="6" name="Picture 5" descr="15_workflow_observability.png"/>
+          <p:cNvPr id="6" name="Picture 5" descr="13_control_plane.png"/>
           <p:cNvPicPr>
             <a:picLocks noChangeAspect="1"/>
           </p:cNvPicPr>
@@ -40610,8 +41145,8 @@
         </p:blipFill>
         <p:spPr>
           <a:xfrm>
-            <a:off x="1737360" y="1051560"/>
-            <a:ext cx="8686800" cy="4886325"/>
+            <a:off x="457200" y="1051560"/>
+            <a:ext cx="5486400" cy="3086100"/>
           </a:xfrm>
           <a:prstGeom prst="rect">
             <a:avLst/>
@@ -40623,9 +41158,38 @@
           </a:ln>
         </p:spPr>
       </p:pic>
-      <p:sp>
-        <p:nvSpPr>
-          <p:cNvPr id="7" name="TextBox 6"/>
+      <p:pic>
+        <p:nvPicPr>
+          <p:cNvPr id="7" name="Picture 6" descr="14_usage_audit.png"/>
+          <p:cNvPicPr>
+            <a:picLocks noChangeAspect="1"/>
+          </p:cNvPicPr>
+          <p:nvPr/>
+        </p:nvPicPr>
+        <p:blipFill>
+          <a:blip r:embed="rId3"/>
+          <a:stretch>
+            <a:fillRect/>
+          </a:stretch>
+        </p:blipFill>
+        <p:spPr>
+          <a:xfrm>
+            <a:off x="6172200" y="1051560"/>
+            <a:ext cx="5486400" cy="3086100"/>
+          </a:xfrm>
+          <a:prstGeom prst="rect">
+            <a:avLst/>
+          </a:prstGeom>
+          <a:ln w="12700">
+            <a:solidFill>
+              <a:srgbClr val="334155"/>
+            </a:solidFill>
+          </a:ln>
+        </p:spPr>
+      </p:pic>
+      <p:sp>
+        <p:nvSpPr>
+          <p:cNvPr id="8" name="TextBox 7"/>
           <p:cNvSpPr txBox="1"/>
           <p:nvPr/>
         </p:nvSpPr>
@@ -40656,7 +41220,7 @@
                   <a:srgbClr val="CBD5E1"/>
                 </a:solidFill>
               </a:rPr>
-              <a:t>① Every workflow run is logged here with per-node execution trace, total duration, and final status — including an “Awaiting Approval” count with a direct “Review →” link for paused runs.</a:t>
+              <a:t>① Control Plane — live platform health: active agents, runs, guardrail triggers, and average latency in one dashboard, refreshed in real time.</a:t>
             </a:r>
           </a:p>
           <a:p>
@@ -40671,7 +41235,7 @@
                   <a:srgbClr val="CBD5E1"/>
                 </a:solidFill>
               </a:rPr>
-              <a:t>② Backed by real OpenTelemetry spans on every LLM call, so a slow or failed run can be traced back to the exact node, prompt, and latency that caused it — not a black box.</a:t>
+              <a:t>② Usage &amp; Traceability — full audit-log viewer: every agent action with user, resource, input/output snapshot, guardrail trigger, latency, and trace ID, filterable by action/agent/date.</a:t>
             </a:r>
           </a:p>
         </p:txBody>
@@ -40710,7 +41274,7 @@
         <p:spPr>
           <a:xfrm>
             <a:off x="0" y="0"/>
-            <a:ext cx="12188952" cy="6858000"/>
+            <a:ext cx="12188825" cy="6858000"/>
           </a:xfrm>
           <a:prstGeom prst="rect">
             <a:avLst/>
@@ -40721,6 +41285,7 @@
           <a:ln>
             <a:noFill/>
           </a:ln>
+          <a:effectLst/>
         </p:spPr>
         <p:style>
           <a:lnRef idx="1">
@@ -40753,8 +41318,8 @@
         </p:nvSpPr>
         <p:spPr>
           <a:xfrm>
-            <a:off x="0" y="0"/>
-            <a:ext cx="12188952" cy="45720"/>
+            <a:off x="0" y="73152"/>
+            <a:ext cx="12188825" cy="45720"/>
           </a:xfrm>
           <a:prstGeom prst="rect">
             <a:avLst/>
@@ -40765,6 +41330,7 @@
           <a:ln>
             <a:noFill/>
           </a:ln>
+          <a:effectLst/>
         </p:spPr>
         <p:style>
           <a:lnRef idx="1">
@@ -40791,516 +41357,148 @@
       </p:sp>
       <p:sp>
         <p:nvSpPr>
-          <p:cNvPr id="4" name="Rectangle 3"/>
-          <p:cNvSpPr/>
-          <p:nvPr/>
-        </p:nvSpPr>
-        <p:spPr>
-          <a:xfrm>
-            <a:off x="0" y="1371600"/>
-            <a:ext cx="12188952" cy="4114800"/>
-          </a:xfrm>
-          <a:prstGeom prst="rect">
-            <a:avLst/>
-          </a:prstGeom>
-          <a:solidFill>
-            <a:srgbClr val="1A243E"/>
-          </a:solidFill>
-          <a:ln>
-            <a:noFill/>
+          <p:cNvPr id="4" name="TextBox 3"/>
+          <p:cNvSpPr txBox="1"/>
+          <p:nvPr/>
+        </p:nvSpPr>
+        <p:spPr>
+          <a:xfrm>
+            <a:off x="457200" y="274320"/>
+            <a:ext cx="10972800" cy="548640"/>
+          </a:xfrm>
+          <a:prstGeom prst="rect">
+            <a:avLst/>
+          </a:prstGeom>
+          <a:noFill/>
+        </p:spPr>
+        <p:txBody>
+          <a:bodyPr wrap="square">
+            <a:spAutoFit/>
+          </a:bodyPr>
+          <a:lstStyle/>
+          <a:p>
+            <a:r>
+              <a:rPr sz="2600" b="1">
+                <a:solidFill>
+                  <a:srgbClr val="FFFFFF"/>
+                </a:solidFill>
+              </a:rPr>
+              <a:t>How To Use: Workflow Observability — Tracing &amp; Logs</a:t>
+            </a:r>
+          </a:p>
+        </p:txBody>
+      </p:sp>
+      <p:sp>
+        <p:nvSpPr>
+          <p:cNvPr id="5" name="TextBox 4"/>
+          <p:cNvSpPr txBox="1"/>
+          <p:nvPr/>
+        </p:nvSpPr>
+        <p:spPr>
+          <a:xfrm>
+            <a:off x="11731752" y="6492240"/>
+            <a:ext cx="457200" cy="320040"/>
+          </a:xfrm>
+          <a:prstGeom prst="rect">
+            <a:avLst/>
+          </a:prstGeom>
+          <a:noFill/>
+        </p:spPr>
+        <p:txBody>
+          <a:bodyPr wrap="none">
+            <a:spAutoFit/>
+          </a:bodyPr>
+          <a:lstStyle/>
+          <a:p>
+            <a:r>
+              <a:rPr sz="1100">
+                <a:solidFill>
+                  <a:srgbClr val="CBD5E1"/>
+                </a:solidFill>
+              </a:rPr>
+              <a:t>42</a:t>
+            </a:r>
+          </a:p>
+        </p:txBody>
+      </p:sp>
+      <p:pic>
+        <p:nvPicPr>
+          <p:cNvPr id="6" name="Picture 5" descr="15_workflow_observability.png"/>
+          <p:cNvPicPr>
+            <a:picLocks noChangeAspect="1"/>
+          </p:cNvPicPr>
+          <p:nvPr/>
+        </p:nvPicPr>
+        <p:blipFill>
+          <a:blip r:embed="rId2"/>
+          <a:stretch>
+            <a:fillRect/>
+          </a:stretch>
+        </p:blipFill>
+        <p:spPr>
+          <a:xfrm>
+            <a:off x="1737360" y="1051560"/>
+            <a:ext cx="8686800" cy="4886325"/>
+          </a:xfrm>
+          <a:prstGeom prst="rect">
+            <a:avLst/>
+          </a:prstGeom>
+          <a:ln w="12700">
+            <a:solidFill>
+              <a:srgbClr val="334155"/>
+            </a:solidFill>
           </a:ln>
         </p:spPr>
-        <p:style>
-          <a:lnRef idx="1">
-            <a:schemeClr val="accent1"/>
-          </a:lnRef>
-          <a:fillRef idx="3">
-            <a:schemeClr val="accent1"/>
-          </a:fillRef>
-          <a:effectRef idx="2">
-            <a:schemeClr val="accent1"/>
-          </a:effectRef>
-          <a:fontRef idx="minor">
-            <a:schemeClr val="lt1"/>
-          </a:fontRef>
-        </p:style>
-        <p:txBody>
-          <a:bodyPr rtlCol="0" anchor="ctr"/>
-          <a:lstStyle/>
-          <a:p>
-            <a:pPr algn="ctr"/>
-            <a:endParaRPr/>
-          </a:p>
-        </p:txBody>
-      </p:sp>
-      <p:sp>
-        <p:nvSpPr>
-          <p:cNvPr id="5" name="TextBox 4"/>
-          <p:cNvSpPr txBox="1"/>
-          <p:nvPr/>
-        </p:nvSpPr>
-        <p:spPr>
-          <a:xfrm>
-            <a:off x="457200" y="1645920"/>
-            <a:ext cx="10972800" cy="914400"/>
-          </a:xfrm>
-          <a:prstGeom prst="rect">
-            <a:avLst/>
-          </a:prstGeom>
-          <a:noFill/>
-        </p:spPr>
-        <p:txBody>
-          <a:bodyPr wrap="square">
-            <a:spAutoFit/>
-          </a:bodyPr>
-          <a:lstStyle/>
-          <a:p>
-            <a:pPr algn="ctr"/>
-            <a:r>
-              <a:rPr sz="5400" b="1">
-                <a:solidFill>
-                  <a:srgbClr val="FFFFFF"/>
-                </a:solidFill>
-              </a:rPr>
-              <a:t>AgentForge</a:t>
-            </a:r>
-          </a:p>
-        </p:txBody>
-      </p:sp>
-      <p:sp>
-        <p:nvSpPr>
-          <p:cNvPr id="6" name="TextBox 5"/>
-          <p:cNvSpPr txBox="1"/>
-          <p:nvPr/>
-        </p:nvSpPr>
-        <p:spPr>
-          <a:xfrm>
-            <a:off x="457200" y="2606040"/>
-            <a:ext cx="10972800" cy="731520"/>
-          </a:xfrm>
-          <a:prstGeom prst="rect">
-            <a:avLst/>
-          </a:prstGeom>
-          <a:noFill/>
-        </p:spPr>
-        <p:txBody>
-          <a:bodyPr wrap="square">
-            <a:spAutoFit/>
-          </a:bodyPr>
-          <a:lstStyle/>
-          <a:p>
-            <a:pPr algn="ctr"/>
-            <a:r>
-              <a:rPr sz="2200" b="0">
+      </p:pic>
+      <p:sp>
+        <p:nvSpPr>
+          <p:cNvPr id="7" name="TextBox 6"/>
+          <p:cNvSpPr txBox="1"/>
+          <p:nvPr/>
+        </p:nvSpPr>
+        <p:spPr>
+          <a:xfrm>
+            <a:off x="457200" y="6157341"/>
+            <a:ext cx="11247120" cy="482183"/>
+          </a:xfrm>
+          <a:prstGeom prst="rect">
+            <a:avLst/>
+          </a:prstGeom>
+          <a:noFill/>
+        </p:spPr>
+        <p:txBody>
+          <a:bodyPr wrap="square">
+            <a:spAutoFit/>
+          </a:bodyPr>
+          <a:lstStyle/>
+          <a:p>
+            <a:pPr>
+              <a:spcAft>
+                <a:spcPts val="400"/>
+              </a:spcAft>
+            </a:pPr>
+            <a:r>
+              <a:rPr sz="1100" dirty="0">
                 <a:solidFill>
                   <a:srgbClr val="CBD5E1"/>
                 </a:solidFill>
               </a:rPr>
-              <a:t>Build the next generation of enterprise AI agents — today.</a:t>
-            </a:r>
-          </a:p>
-        </p:txBody>
-      </p:sp>
-      <p:sp>
-        <p:nvSpPr>
-          <p:cNvPr id="7" name="Rectangle 6"/>
-          <p:cNvSpPr/>
-          <p:nvPr/>
-        </p:nvSpPr>
-        <p:spPr>
-          <a:xfrm>
-            <a:off x="1371600" y="3657600"/>
-            <a:ext cx="2834640" cy="777240"/>
-          </a:xfrm>
-          <a:prstGeom prst="rect">
-            <a:avLst/>
-          </a:prstGeom>
-          <a:solidFill>
-            <a:srgbClr val="606EF5"/>
-          </a:solidFill>
-          <a:ln>
-            <a:noFill/>
-          </a:ln>
-        </p:spPr>
-        <p:style>
-          <a:lnRef idx="1">
-            <a:schemeClr val="accent1"/>
-          </a:lnRef>
-          <a:fillRef idx="3">
-            <a:schemeClr val="accent1"/>
-          </a:fillRef>
-          <a:effectRef idx="2">
-            <a:schemeClr val="accent1"/>
-          </a:effectRef>
-          <a:fontRef idx="minor">
-            <a:schemeClr val="lt1"/>
-          </a:fontRef>
-        </p:style>
-        <p:txBody>
-          <a:bodyPr rtlCol="0" anchor="ctr"/>
-          <a:lstStyle/>
-          <a:p>
-            <a:pPr algn="ctr"/>
-            <a:endParaRPr/>
-          </a:p>
-        </p:txBody>
-      </p:sp>
-      <p:sp>
-        <p:nvSpPr>
-          <p:cNvPr id="8" name="TextBox 7"/>
-          <p:cNvSpPr txBox="1"/>
-          <p:nvPr/>
-        </p:nvSpPr>
-        <p:spPr>
-          <a:xfrm>
-            <a:off x="1371600" y="3703320"/>
-            <a:ext cx="2834640" cy="384048"/>
-          </a:xfrm>
-          <a:prstGeom prst="rect">
-            <a:avLst/>
-          </a:prstGeom>
-          <a:noFill/>
-        </p:spPr>
-        <p:txBody>
-          <a:bodyPr wrap="square">
-            <a:spAutoFit/>
-          </a:bodyPr>
-          <a:lstStyle/>
-          <a:p>
-            <a:pPr algn="ctr"/>
-            <a:r>
-              <a:rPr sz="1400" b="1">
-                <a:solidFill>
-                  <a:srgbClr val="FFFFFF"/>
-                </a:solidFill>
-              </a:rPr>
-              <a:t>🚀  Start Building</a:t>
-            </a:r>
-          </a:p>
-        </p:txBody>
-      </p:sp>
-      <p:sp>
-        <p:nvSpPr>
-          <p:cNvPr id="9" name="TextBox 8"/>
-          <p:cNvSpPr txBox="1"/>
-          <p:nvPr/>
-        </p:nvSpPr>
-        <p:spPr>
-          <a:xfrm>
-            <a:off x="1371600" y="4087368"/>
-            <a:ext cx="2834640" cy="320040"/>
-          </a:xfrm>
-          <a:prstGeom prst="rect">
-            <a:avLst/>
-          </a:prstGeom>
-          <a:noFill/>
-        </p:spPr>
-        <p:txBody>
-          <a:bodyPr wrap="square">
-            <a:spAutoFit/>
-          </a:bodyPr>
-          <a:lstStyle/>
-          <a:p>
-            <a:pPr algn="ctr"/>
-            <a:r>
-              <a:rPr sz="1100" b="0">
-                <a:solidFill>
-                  <a:srgbClr val="FFFFFF"/>
-                </a:solidFill>
-              </a:rPr>
-              <a:t>localhost:5173/architect</a:t>
-            </a:r>
-          </a:p>
-        </p:txBody>
-      </p:sp>
-      <p:sp>
-        <p:nvSpPr>
-          <p:cNvPr id="10" name="Rectangle 9"/>
-          <p:cNvSpPr/>
-          <p:nvPr/>
-        </p:nvSpPr>
-        <p:spPr>
-          <a:xfrm>
-            <a:off x="4572000" y="3657600"/>
-            <a:ext cx="2834640" cy="777240"/>
-          </a:xfrm>
-          <a:prstGeom prst="rect">
-            <a:avLst/>
-          </a:prstGeom>
-          <a:solidFill>
-            <a:srgbClr val="10B981"/>
-          </a:solidFill>
-          <a:ln>
-            <a:noFill/>
-          </a:ln>
-        </p:spPr>
-        <p:style>
-          <a:lnRef idx="1">
-            <a:schemeClr val="accent1"/>
-          </a:lnRef>
-          <a:fillRef idx="3">
-            <a:schemeClr val="accent1"/>
-          </a:fillRef>
-          <a:effectRef idx="2">
-            <a:schemeClr val="accent1"/>
-          </a:effectRef>
-          <a:fontRef idx="minor">
-            <a:schemeClr val="lt1"/>
-          </a:fontRef>
-        </p:style>
-        <p:txBody>
-          <a:bodyPr rtlCol="0" anchor="ctr"/>
-          <a:lstStyle/>
-          <a:p>
-            <a:pPr algn="ctr"/>
-            <a:endParaRPr/>
-          </a:p>
-        </p:txBody>
-      </p:sp>
-      <p:sp>
-        <p:nvSpPr>
-          <p:cNvPr id="11" name="TextBox 10"/>
-          <p:cNvSpPr txBox="1"/>
-          <p:nvPr/>
-        </p:nvSpPr>
-        <p:spPr>
-          <a:xfrm>
-            <a:off x="4572000" y="3703320"/>
-            <a:ext cx="2834640" cy="384048"/>
-          </a:xfrm>
-          <a:prstGeom prst="rect">
-            <a:avLst/>
-          </a:prstGeom>
-          <a:noFill/>
-        </p:spPr>
-        <p:txBody>
-          <a:bodyPr wrap="square">
-            <a:spAutoFit/>
-          </a:bodyPr>
-          <a:lstStyle/>
-          <a:p>
-            <a:pPr algn="ctr"/>
-            <a:r>
-              <a:rPr sz="1400" b="1">
-                <a:solidFill>
-                  <a:srgbClr val="FFFFFF"/>
-                </a:solidFill>
-              </a:rPr>
-              <a:t>📖  API Docs</a:t>
-            </a:r>
-          </a:p>
-        </p:txBody>
-      </p:sp>
-      <p:sp>
-        <p:nvSpPr>
-          <p:cNvPr id="12" name="TextBox 11"/>
-          <p:cNvSpPr txBox="1"/>
-          <p:nvPr/>
-        </p:nvSpPr>
-        <p:spPr>
-          <a:xfrm>
-            <a:off x="4572000" y="4087368"/>
-            <a:ext cx="2834640" cy="320040"/>
-          </a:xfrm>
-          <a:prstGeom prst="rect">
-            <a:avLst/>
-          </a:prstGeom>
-          <a:noFill/>
-        </p:spPr>
-        <p:txBody>
-          <a:bodyPr wrap="square">
-            <a:spAutoFit/>
-          </a:bodyPr>
-          <a:lstStyle/>
-          <a:p>
-            <a:pPr algn="ctr"/>
-            <a:r>
-              <a:rPr sz="1100" b="0">
-                <a:solidFill>
-                  <a:srgbClr val="FFFFFF"/>
-                </a:solidFill>
-              </a:rPr>
-              <a:t>localhost:8000/docs</a:t>
-            </a:r>
-          </a:p>
-        </p:txBody>
-      </p:sp>
-      <p:sp>
-        <p:nvSpPr>
-          <p:cNvPr id="13" name="Rectangle 12"/>
-          <p:cNvSpPr/>
-          <p:nvPr/>
-        </p:nvSpPr>
-        <p:spPr>
-          <a:xfrm>
-            <a:off x="7772400" y="3657600"/>
-            <a:ext cx="2834640" cy="777240"/>
-          </a:xfrm>
-          <a:prstGeom prst="rect">
-            <a:avLst/>
-          </a:prstGeom>
-          <a:solidFill>
-            <a:srgbClr val="F59E0B"/>
-          </a:solidFill>
-          <a:ln>
-            <a:noFill/>
-          </a:ln>
-        </p:spPr>
-        <p:style>
-          <a:lnRef idx="1">
-            <a:schemeClr val="accent1"/>
-          </a:lnRef>
-          <a:fillRef idx="3">
-            <a:schemeClr val="accent1"/>
-          </a:fillRef>
-          <a:effectRef idx="2">
-            <a:schemeClr val="accent1"/>
-          </a:effectRef>
-          <a:fontRef idx="minor">
-            <a:schemeClr val="lt1"/>
-          </a:fontRef>
-        </p:style>
-        <p:txBody>
-          <a:bodyPr rtlCol="0" anchor="ctr"/>
-          <a:lstStyle/>
-          <a:p>
-            <a:pPr algn="ctr"/>
-            <a:endParaRPr/>
-          </a:p>
-        </p:txBody>
-      </p:sp>
-      <p:sp>
-        <p:nvSpPr>
-          <p:cNvPr id="14" name="TextBox 13"/>
-          <p:cNvSpPr txBox="1"/>
-          <p:nvPr/>
-        </p:nvSpPr>
-        <p:spPr>
-          <a:xfrm>
-            <a:off x="7772400" y="3703320"/>
-            <a:ext cx="2834640" cy="384048"/>
-          </a:xfrm>
-          <a:prstGeom prst="rect">
-            <a:avLst/>
-          </a:prstGeom>
-          <a:noFill/>
-        </p:spPr>
-        <p:txBody>
-          <a:bodyPr wrap="square">
-            <a:spAutoFit/>
-          </a:bodyPr>
-          <a:lstStyle/>
-          <a:p>
-            <a:pPr algn="ctr"/>
-            <a:r>
-              <a:rPr sz="1400" b="1">
-                <a:solidFill>
-                  <a:srgbClr val="FFFFFF"/>
-                </a:solidFill>
-              </a:rPr>
-              <a:t>📦  Download ZIP</a:t>
-            </a:r>
-          </a:p>
-        </p:txBody>
-      </p:sp>
-      <p:sp>
-        <p:nvSpPr>
-          <p:cNvPr id="15" name="TextBox 14"/>
-          <p:cNvSpPr txBox="1"/>
-          <p:nvPr/>
-        </p:nvSpPr>
-        <p:spPr>
-          <a:xfrm>
-            <a:off x="7772400" y="4087368"/>
-            <a:ext cx="2834640" cy="320040"/>
-          </a:xfrm>
-          <a:prstGeom prst="rect">
-            <a:avLst/>
-          </a:prstGeom>
-          <a:noFill/>
-        </p:spPr>
-        <p:txBody>
-          <a:bodyPr wrap="square">
-            <a:spAutoFit/>
-          </a:bodyPr>
-          <a:lstStyle/>
-          <a:p>
-            <a:pPr algn="ctr"/>
-            <a:r>
-              <a:rPr sz="1100" b="0">
-                <a:solidFill>
-                  <a:srgbClr val="FFFFFF"/>
-                </a:solidFill>
-              </a:rPr>
-              <a:t>Architect → App → Download</a:t>
-            </a:r>
-          </a:p>
-        </p:txBody>
-      </p:sp>
-      <p:sp>
-        <p:nvSpPr>
-          <p:cNvPr id="16" name="TextBox 15"/>
-          <p:cNvSpPr txBox="1"/>
-          <p:nvPr/>
-        </p:nvSpPr>
-        <p:spPr>
-          <a:xfrm>
-            <a:off x="457200" y="5760720"/>
-            <a:ext cx="10972800" cy="365760"/>
-          </a:xfrm>
-          <a:prstGeom prst="rect">
-            <a:avLst/>
-          </a:prstGeom>
-          <a:noFill/>
-        </p:spPr>
-        <p:txBody>
-          <a:bodyPr wrap="square">
-            <a:spAutoFit/>
-          </a:bodyPr>
-          <a:lstStyle/>
-          <a:p>
-            <a:pPr algn="ctr"/>
-            <a:r>
-              <a:rPr sz="1200" b="0">
+              <a:t>① Every workflow run is logged here with per-node execution trace, total duration, and final status — including an “Awaiting Approval” count with a direct “Review →” link for paused runs.</a:t>
+            </a:r>
+          </a:p>
+          <a:p>
+            <a:pPr>
+              <a:spcAft>
+                <a:spcPts val="400"/>
+              </a:spcAft>
+            </a:pPr>
+            <a:r>
+              <a:rPr sz="1100" dirty="0">
                 <a:solidFill>
                   <a:srgbClr val="CBD5E1"/>
                 </a:solidFill>
               </a:rPr>
-              <a:t>Accenture Technology  |  n.sureshmanikandan@accenture.com  |  Confidential</a:t>
-            </a:r>
-          </a:p>
-        </p:txBody>
-      </p:sp>
-      <p:sp>
-        <p:nvSpPr>
-          <p:cNvPr id="17" name="TextBox 16"/>
-          <p:cNvSpPr txBox="1"/>
-          <p:nvPr/>
-        </p:nvSpPr>
-        <p:spPr>
-          <a:xfrm>
-            <a:off x="11640312" y="6492240"/>
-            <a:ext cx="457200" cy="320040"/>
-          </a:xfrm>
-          <a:prstGeom prst="rect">
-            <a:avLst/>
-          </a:prstGeom>
-          <a:noFill/>
-        </p:spPr>
-        <p:txBody>
-          <a:bodyPr wrap="square">
-            <a:spAutoFit/>
-          </a:bodyPr>
-          <a:lstStyle/>
-          <a:p>
-            <a:pPr algn="r"/>
-            <a:r>
-              <a:rPr sz="1100" b="0">
-                <a:solidFill>
-                  <a:srgbClr val="CBD5E1"/>
-                </a:solidFill>
-              </a:rPr>
-              <a:t>37</a:t>
+              <a:t>② Backed by real Open Telemetry spans on every LLM call, so a slow or failed run can be traced back to the exact node, prompt, and latency that caused it — not a black box.</a:t>
             </a:r>
           </a:p>
         </p:txBody>
@@ -41314,7 +41512,7 @@
 </file>
 
 <file path=ppt/slides/slide44.xml><?xml version="1.0" encoding="utf-8"?>
-<p:sld xmlns:a="http://schemas.openxmlformats.org/drawingml/2006/main" xmlns:p="http://schemas.openxmlformats.org/presentationml/2006/main" xmlns:r="http://schemas.openxmlformats.org/officeDocument/2006/relationships">
+<p:sld xmlns:a="http://schemas.openxmlformats.org/drawingml/2006/main" xmlns:r="http://schemas.openxmlformats.org/officeDocument/2006/relationships" xmlns:p="http://schemas.openxmlformats.org/presentationml/2006/main">
   <p:cSld>
     <p:spTree>
       <p:nvGrpSpPr>
@@ -41322,7 +41520,14 @@
         <p:cNvGrpSpPr/>
         <p:nvPr/>
       </p:nvGrpSpPr>
-      <p:grpSpPr/>
+      <p:grpSpPr>
+        <a:xfrm>
+          <a:off x="0" y="0"/>
+          <a:ext cx="0" cy="0"/>
+          <a:chOff x="0" y="0"/>
+          <a:chExt cx="0" cy="0"/>
+        </a:xfrm>
+      </p:grpSpPr>
       <p:sp>
         <p:nvSpPr>
           <p:cNvPr id="2" name="Rectangle 1"/>
@@ -41343,7 +41548,6 @@
           <a:ln>
             <a:noFill/>
           </a:ln>
-          <a:effectLst/>
         </p:spPr>
         <p:style>
           <a:lnRef idx="1">
@@ -41364,6 +41568,7 @@
           <a:lstStyle/>
           <a:p>
             <a:pPr algn="ctr"/>
+            <a:endParaRPr/>
           </a:p>
         </p:txBody>
       </p:sp>
@@ -41375,7 +41580,7 @@
         </p:nvSpPr>
         <p:spPr>
           <a:xfrm>
-            <a:off x="0" y="73152"/>
+            <a:off x="0" y="0"/>
             <a:ext cx="12188952" cy="45720"/>
           </a:xfrm>
           <a:prstGeom prst="rect">
@@ -41387,7 +41592,6 @@
           <a:ln>
             <a:noFill/>
           </a:ln>
-          <a:effectLst/>
         </p:spPr>
         <p:style>
           <a:lnRef idx="1">
@@ -41408,87 +41612,132 @@
           <a:lstStyle/>
           <a:p>
             <a:pPr algn="ctr"/>
-          </a:p>
-        </p:txBody>
-      </p:sp>
-      <p:sp>
-        <p:nvSpPr>
-          <p:cNvPr id="4" name="TextBox 3"/>
-          <p:cNvSpPr txBox="1"/>
-          <p:nvPr/>
-        </p:nvSpPr>
-        <p:spPr>
-          <a:xfrm>
-            <a:off x="457200" y="274320"/>
-            <a:ext cx="10972800" cy="548640"/>
-          </a:xfrm>
-          <a:prstGeom prst="rect">
-            <a:avLst/>
-          </a:prstGeom>
-          <a:noFill/>
-        </p:spPr>
-        <p:txBody>
-          <a:bodyPr wrap="square">
-            <a:spAutoFit/>
-          </a:bodyPr>
-          <a:lstStyle/>
-          <a:p>
-            <a:pPr algn="l"/>
-            <a:r>
-              <a:rPr sz="2600" b="1">
+            <a:endParaRPr/>
+          </a:p>
+        </p:txBody>
+      </p:sp>
+      <p:sp>
+        <p:nvSpPr>
+          <p:cNvPr id="4" name="Rectangle 3"/>
+          <p:cNvSpPr/>
+          <p:nvPr/>
+        </p:nvSpPr>
+        <p:spPr>
+          <a:xfrm>
+            <a:off x="0" y="1371600"/>
+            <a:ext cx="12188952" cy="4114800"/>
+          </a:xfrm>
+          <a:prstGeom prst="rect">
+            <a:avLst/>
+          </a:prstGeom>
+          <a:solidFill>
+            <a:srgbClr val="1A243E"/>
+          </a:solidFill>
+          <a:ln>
+            <a:noFill/>
+          </a:ln>
+        </p:spPr>
+        <p:style>
+          <a:lnRef idx="1">
+            <a:schemeClr val="accent1"/>
+          </a:lnRef>
+          <a:fillRef idx="3">
+            <a:schemeClr val="accent1"/>
+          </a:fillRef>
+          <a:effectRef idx="2">
+            <a:schemeClr val="accent1"/>
+          </a:effectRef>
+          <a:fontRef idx="minor">
+            <a:schemeClr val="lt1"/>
+          </a:fontRef>
+        </p:style>
+        <p:txBody>
+          <a:bodyPr rtlCol="0" anchor="ctr"/>
+          <a:lstStyle/>
+          <a:p>
+            <a:pPr algn="ctr"/>
+            <a:endParaRPr/>
+          </a:p>
+        </p:txBody>
+      </p:sp>
+      <p:sp>
+        <p:nvSpPr>
+          <p:cNvPr id="5" name="TextBox 4"/>
+          <p:cNvSpPr txBox="1"/>
+          <p:nvPr/>
+        </p:nvSpPr>
+        <p:spPr>
+          <a:xfrm>
+            <a:off x="457200" y="1645920"/>
+            <a:ext cx="10972800" cy="914400"/>
+          </a:xfrm>
+          <a:prstGeom prst="rect">
+            <a:avLst/>
+          </a:prstGeom>
+          <a:noFill/>
+        </p:spPr>
+        <p:txBody>
+          <a:bodyPr wrap="square">
+            <a:spAutoFit/>
+          </a:bodyPr>
+          <a:lstStyle/>
+          <a:p>
+            <a:pPr algn="ctr"/>
+            <a:r>
+              <a:rPr sz="5400" b="1">
                 <a:solidFill>
                   <a:srgbClr val="FFFFFF"/>
                 </a:solidFill>
               </a:rPr>
-              <a:t>Workflow Builder — Testing &amp; Human-in-the-Loop UX</a:t>
-            </a:r>
-          </a:p>
-        </p:txBody>
-      </p:sp>
-      <p:sp>
-        <p:nvSpPr>
-          <p:cNvPr id="5" name="TextBox 4"/>
-          <p:cNvSpPr txBox="1"/>
-          <p:nvPr/>
-        </p:nvSpPr>
-        <p:spPr>
-          <a:xfrm>
-            <a:off x="457200" y="868680"/>
-            <a:ext cx="11247120" cy="548640"/>
-          </a:xfrm>
-          <a:prstGeom prst="rect">
-            <a:avLst/>
-          </a:prstGeom>
-          <a:noFill/>
-        </p:spPr>
-        <p:txBody>
-          <a:bodyPr wrap="square">
-            <a:spAutoFit/>
-          </a:bodyPr>
-          <a:lstStyle/>
-          <a:p>
-            <a:pPr algn="l"/>
-            <a:r>
-              <a:rPr sz="1300" b="0">
+              <a:t>AgentForge</a:t>
+            </a:r>
+          </a:p>
+        </p:txBody>
+      </p:sp>
+      <p:sp>
+        <p:nvSpPr>
+          <p:cNvPr id="6" name="TextBox 5"/>
+          <p:cNvSpPr txBox="1"/>
+          <p:nvPr/>
+        </p:nvSpPr>
+        <p:spPr>
+          <a:xfrm>
+            <a:off x="457200" y="2606040"/>
+            <a:ext cx="10972800" cy="731520"/>
+          </a:xfrm>
+          <a:prstGeom prst="rect">
+            <a:avLst/>
+          </a:prstGeom>
+          <a:noFill/>
+        </p:spPr>
+        <p:txBody>
+          <a:bodyPr wrap="square">
+            <a:spAutoFit/>
+          </a:bodyPr>
+          <a:lstStyle/>
+          <a:p>
+            <a:pPr algn="ctr"/>
+            <a:r>
+              <a:rPr sz="2200" b="0">
                 <a:solidFill>
                   <a:srgbClr val="CBD5E1"/>
                 </a:solidFill>
               </a:rPr>
-              <a:t>A tester reported “Save Workflow saved with a junk timestamp name” and “the approval step feels like an error.” Both traced to real gaps, now closed — verified live against a running backend, not just unit tests.</a:t>
-            </a:r>
-          </a:p>
-        </p:txBody>
-      </p:sp>
-      <p:sp>
-        <p:nvSpPr>
-          <p:cNvPr id="6" name="Rectangle 5"/>
+              <a:t>Build the next generation of enterprise AI agents — today.</a:t>
+            </a:r>
+          </a:p>
+        </p:txBody>
+      </p:sp>
+      <p:sp>
+        <p:nvSpPr>
+          <p:cNvPr id="7" name="Rectangle 6"/>
           <p:cNvSpPr/>
           <p:nvPr/>
         </p:nvSpPr>
         <p:spPr>
           <a:xfrm>
-            <a:off x="365760" y="1536192"/>
-            <a:ext cx="73152" cy="777240"/>
+            <a:off x="1371600" y="3657600"/>
+            <a:ext cx="2834640" cy="777240"/>
           </a:xfrm>
           <a:prstGeom prst="rect">
             <a:avLst/>
@@ -41499,7 +41748,6 @@
           <a:ln>
             <a:noFill/>
           </a:ln>
-          <a:effectLst/>
         </p:spPr>
         <p:style>
           <a:lnRef idx="1">
@@ -41520,98 +41768,98 @@
           <a:lstStyle/>
           <a:p>
             <a:pPr algn="ctr"/>
-          </a:p>
-        </p:txBody>
-      </p:sp>
-      <p:sp>
-        <p:nvSpPr>
-          <p:cNvPr id="7" name="TextBox 6"/>
-          <p:cNvSpPr txBox="1"/>
-          <p:nvPr/>
-        </p:nvSpPr>
-        <p:spPr>
-          <a:xfrm>
-            <a:off x="594360" y="1554480"/>
-            <a:ext cx="10972800" cy="365760"/>
-          </a:xfrm>
-          <a:prstGeom prst="rect">
-            <a:avLst/>
-          </a:prstGeom>
-          <a:noFill/>
-        </p:spPr>
-        <p:txBody>
-          <a:bodyPr wrap="square">
-            <a:spAutoFit/>
-          </a:bodyPr>
-          <a:lstStyle/>
-          <a:p>
-            <a:pPr algn="l"/>
+            <a:endParaRPr/>
+          </a:p>
+        </p:txBody>
+      </p:sp>
+      <p:sp>
+        <p:nvSpPr>
+          <p:cNvPr id="8" name="TextBox 7"/>
+          <p:cNvSpPr txBox="1"/>
+          <p:nvPr/>
+        </p:nvSpPr>
+        <p:spPr>
+          <a:xfrm>
+            <a:off x="1371600" y="3703320"/>
+            <a:ext cx="2834640" cy="384048"/>
+          </a:xfrm>
+          <a:prstGeom prst="rect">
+            <a:avLst/>
+          </a:prstGeom>
+          <a:noFill/>
+        </p:spPr>
+        <p:txBody>
+          <a:bodyPr wrap="square">
+            <a:spAutoFit/>
+          </a:bodyPr>
+          <a:lstStyle/>
+          <a:p>
+            <a:pPr algn="ctr"/>
             <a:r>
               <a:rPr sz="1400" b="1">
                 <a:solidFill>
-                  <a:srgbClr val="606EF5"/>
-                </a:solidFill>
-              </a:rPr>
-              <a:t>💾  Save Workflow — Real Names, Not Timestamps</a:t>
-            </a:r>
-          </a:p>
-        </p:txBody>
-      </p:sp>
-      <p:sp>
-        <p:nvSpPr>
-          <p:cNvPr id="8" name="TextBox 7"/>
-          <p:cNvSpPr txBox="1"/>
-          <p:nvPr/>
-        </p:nvSpPr>
-        <p:spPr>
-          <a:xfrm>
-            <a:off x="594360" y="1920303"/>
-            <a:ext cx="11064240" cy="457200"/>
-          </a:xfrm>
-          <a:prstGeom prst="rect">
-            <a:avLst/>
-          </a:prstGeom>
-          <a:noFill/>
-        </p:spPr>
-        <p:txBody>
-          <a:bodyPr wrap="square">
-            <a:spAutoFit/>
-          </a:bodyPr>
-          <a:lstStyle/>
-          <a:p>
-            <a:pPr algn="l"/>
+                  <a:srgbClr val="FFFFFF"/>
+                </a:solidFill>
+              </a:rPr>
+              <a:t>🚀  Start Building</a:t>
+            </a:r>
+          </a:p>
+        </p:txBody>
+      </p:sp>
+      <p:sp>
+        <p:nvSpPr>
+          <p:cNvPr id="9" name="TextBox 8"/>
+          <p:cNvSpPr txBox="1"/>
+          <p:nvPr/>
+        </p:nvSpPr>
+        <p:spPr>
+          <a:xfrm>
+            <a:off x="1371600" y="4087368"/>
+            <a:ext cx="2834640" cy="320040"/>
+          </a:xfrm>
+          <a:prstGeom prst="rect">
+            <a:avLst/>
+          </a:prstGeom>
+          <a:noFill/>
+        </p:spPr>
+        <p:txBody>
+          <a:bodyPr wrap="square">
+            <a:spAutoFit/>
+          </a:bodyPr>
+          <a:lstStyle/>
+          <a:p>
+            <a:pPr algn="ctr"/>
             <a:r>
               <a:rPr sz="1100" b="0">
                 <a:solidFill>
-                  <a:srgbClr val="CBD5E1"/>
-                </a:solidFill>
-              </a:rPr>
-              <a:t>“Save Workflow” only wrote to browser localStorage and never reached the backend — the junk “Workflow 8:14:41 PM” entries actually came from Run/Deploy auto-saving silently to get a workflow_id. Save Workflow now prompts for a real name and persists it directly.</a:t>
-            </a:r>
-          </a:p>
-        </p:txBody>
-      </p:sp>
-      <p:sp>
-        <p:nvSpPr>
-          <p:cNvPr id="9" name="Rectangle 8"/>
+                  <a:srgbClr val="FFFFFF"/>
+                </a:solidFill>
+              </a:rPr>
+              <a:t>localhost:5173/architect</a:t>
+            </a:r>
+          </a:p>
+        </p:txBody>
+      </p:sp>
+      <p:sp>
+        <p:nvSpPr>
+          <p:cNvPr id="10" name="Rectangle 9"/>
           <p:cNvSpPr/>
           <p:nvPr/>
         </p:nvSpPr>
         <p:spPr>
           <a:xfrm>
-            <a:off x="365760" y="2432304"/>
-            <a:ext cx="73152" cy="777240"/>
+            <a:off x="4572000" y="3657600"/>
+            <a:ext cx="2834640" cy="777240"/>
           </a:xfrm>
           <a:prstGeom prst="rect">
             <a:avLst/>
           </a:prstGeom>
           <a:solidFill>
-            <a:srgbClr val="606EF5"/>
+            <a:srgbClr val="10B981"/>
           </a:solidFill>
           <a:ln>
             <a:noFill/>
           </a:ln>
-          <a:effectLst/>
         </p:spPr>
         <p:style>
           <a:lnRef idx="1">
@@ -41632,98 +41880,98 @@
           <a:lstStyle/>
           <a:p>
             <a:pPr algn="ctr"/>
-          </a:p>
-        </p:txBody>
-      </p:sp>
-      <p:sp>
-        <p:nvSpPr>
-          <p:cNvPr id="10" name="TextBox 9"/>
-          <p:cNvSpPr txBox="1"/>
-          <p:nvPr/>
-        </p:nvSpPr>
-        <p:spPr>
-          <a:xfrm>
-            <a:off x="594360" y="2450592"/>
-            <a:ext cx="10972800" cy="365760"/>
-          </a:xfrm>
-          <a:prstGeom prst="rect">
-            <a:avLst/>
-          </a:prstGeom>
-          <a:noFill/>
-        </p:spPr>
-        <p:txBody>
-          <a:bodyPr wrap="square">
-            <a:spAutoFit/>
-          </a:bodyPr>
-          <a:lstStyle/>
-          <a:p>
-            <a:pPr algn="l"/>
+            <a:endParaRPr/>
+          </a:p>
+        </p:txBody>
+      </p:sp>
+      <p:sp>
+        <p:nvSpPr>
+          <p:cNvPr id="11" name="TextBox 10"/>
+          <p:cNvSpPr txBox="1"/>
+          <p:nvPr/>
+        </p:nvSpPr>
+        <p:spPr>
+          <a:xfrm>
+            <a:off x="4572000" y="3703320"/>
+            <a:ext cx="2834640" cy="384048"/>
+          </a:xfrm>
+          <a:prstGeom prst="rect">
+            <a:avLst/>
+          </a:prstGeom>
+          <a:noFill/>
+        </p:spPr>
+        <p:txBody>
+          <a:bodyPr wrap="square">
+            <a:spAutoFit/>
+          </a:bodyPr>
+          <a:lstStyle/>
+          <a:p>
+            <a:pPr algn="ctr"/>
             <a:r>
               <a:rPr sz="1400" b="1">
                 <a:solidFill>
-                  <a:srgbClr val="606EF5"/>
-                </a:solidFill>
-              </a:rPr>
-              <a:t>🗂️  Browse &amp; Load Saved Workflows</a:t>
-            </a:r>
-          </a:p>
-        </p:txBody>
-      </p:sp>
-      <p:sp>
-        <p:nvSpPr>
-          <p:cNvPr id="11" name="TextBox 10"/>
-          <p:cNvSpPr txBox="1"/>
-          <p:nvPr/>
-        </p:nvSpPr>
-        <p:spPr>
-          <a:xfrm>
-            <a:off x="594360" y="2816415"/>
-            <a:ext cx="11064240" cy="457200"/>
-          </a:xfrm>
-          <a:prstGeom prst="rect">
-            <a:avLst/>
-          </a:prstGeom>
-          <a:noFill/>
-        </p:spPr>
-        <p:txBody>
-          <a:bodyPr wrap="square">
-            <a:spAutoFit/>
-          </a:bodyPr>
-          <a:lstStyle/>
-          <a:p>
-            <a:pPr algn="l"/>
+                  <a:srgbClr val="FFFFFF"/>
+                </a:solidFill>
+              </a:rPr>
+              <a:t>📖  API Docs</a:t>
+            </a:r>
+          </a:p>
+        </p:txBody>
+      </p:sp>
+      <p:sp>
+        <p:nvSpPr>
+          <p:cNvPr id="12" name="TextBox 11"/>
+          <p:cNvSpPr txBox="1"/>
+          <p:nvPr/>
+        </p:nvSpPr>
+        <p:spPr>
+          <a:xfrm>
+            <a:off x="4572000" y="4087368"/>
+            <a:ext cx="2834640" cy="320040"/>
+          </a:xfrm>
+          <a:prstGeom prst="rect">
+            <a:avLst/>
+          </a:prstGeom>
+          <a:noFill/>
+        </p:spPr>
+        <p:txBody>
+          <a:bodyPr wrap="square">
+            <a:spAutoFit/>
+          </a:bodyPr>
+          <a:lstStyle/>
+          <a:p>
+            <a:pPr algn="ctr"/>
             <a:r>
               <a:rPr sz="1100" b="0">
                 <a:solidFill>
-                  <a:srgbClr val="CBD5E1"/>
-                </a:solidFill>
-              </a:rPr>
-              <a:t>Load now opens a searchable picker over every backend-saved workflow (name, node count, last updated) instead of silently reading localStorage — selecting one loads it straight onto the canvas, with legacy flat-format workflows normalized so they render instead of crashing.</a:t>
-            </a:r>
-          </a:p>
-        </p:txBody>
-      </p:sp>
-      <p:sp>
-        <p:nvSpPr>
-          <p:cNvPr id="12" name="Rectangle 11"/>
+                  <a:srgbClr val="FFFFFF"/>
+                </a:solidFill>
+              </a:rPr>
+              <a:t>localhost:8000/docs</a:t>
+            </a:r>
+          </a:p>
+        </p:txBody>
+      </p:sp>
+      <p:sp>
+        <p:nvSpPr>
+          <p:cNvPr id="13" name="Rectangle 12"/>
           <p:cNvSpPr/>
           <p:nvPr/>
         </p:nvSpPr>
         <p:spPr>
           <a:xfrm>
-            <a:off x="365760" y="3328416"/>
-            <a:ext cx="73152" cy="777240"/>
+            <a:off x="7772400" y="3657600"/>
+            <a:ext cx="2834640" cy="777240"/>
           </a:xfrm>
           <a:prstGeom prst="rect">
             <a:avLst/>
           </a:prstGeom>
           <a:solidFill>
-            <a:srgbClr val="606EF5"/>
+            <a:srgbClr val="F59E0B"/>
           </a:solidFill>
           <a:ln>
             <a:noFill/>
           </a:ln>
-          <a:effectLst/>
         </p:spPr>
         <p:style>
           <a:lnRef idx="1">
@@ -41744,18 +41992,87 @@
           <a:lstStyle/>
           <a:p>
             <a:pPr algn="ctr"/>
-          </a:p>
-        </p:txBody>
-      </p:sp>
-      <p:sp>
-        <p:nvSpPr>
-          <p:cNvPr id="13" name="TextBox 12"/>
-          <p:cNvSpPr txBox="1"/>
-          <p:nvPr/>
-        </p:nvSpPr>
-        <p:spPr>
-          <a:xfrm>
-            <a:off x="594360" y="3346704"/>
+            <a:endParaRPr/>
+          </a:p>
+        </p:txBody>
+      </p:sp>
+      <p:sp>
+        <p:nvSpPr>
+          <p:cNvPr id="14" name="TextBox 13"/>
+          <p:cNvSpPr txBox="1"/>
+          <p:nvPr/>
+        </p:nvSpPr>
+        <p:spPr>
+          <a:xfrm>
+            <a:off x="7772400" y="3703320"/>
+            <a:ext cx="2834640" cy="384048"/>
+          </a:xfrm>
+          <a:prstGeom prst="rect">
+            <a:avLst/>
+          </a:prstGeom>
+          <a:noFill/>
+        </p:spPr>
+        <p:txBody>
+          <a:bodyPr wrap="square">
+            <a:spAutoFit/>
+          </a:bodyPr>
+          <a:lstStyle/>
+          <a:p>
+            <a:pPr algn="ctr"/>
+            <a:r>
+              <a:rPr sz="1400" b="1">
+                <a:solidFill>
+                  <a:srgbClr val="FFFFFF"/>
+                </a:solidFill>
+              </a:rPr>
+              <a:t>📦  Download ZIP</a:t>
+            </a:r>
+          </a:p>
+        </p:txBody>
+      </p:sp>
+      <p:sp>
+        <p:nvSpPr>
+          <p:cNvPr id="15" name="TextBox 14"/>
+          <p:cNvSpPr txBox="1"/>
+          <p:nvPr/>
+        </p:nvSpPr>
+        <p:spPr>
+          <a:xfrm>
+            <a:off x="7772400" y="4087368"/>
+            <a:ext cx="2834640" cy="320040"/>
+          </a:xfrm>
+          <a:prstGeom prst="rect">
+            <a:avLst/>
+          </a:prstGeom>
+          <a:noFill/>
+        </p:spPr>
+        <p:txBody>
+          <a:bodyPr wrap="square">
+            <a:spAutoFit/>
+          </a:bodyPr>
+          <a:lstStyle/>
+          <a:p>
+            <a:pPr algn="ctr"/>
+            <a:r>
+              <a:rPr sz="1100" b="0">
+                <a:solidFill>
+                  <a:srgbClr val="FFFFFF"/>
+                </a:solidFill>
+              </a:rPr>
+              <a:t>Architect → App → Download</a:t>
+            </a:r>
+          </a:p>
+        </p:txBody>
+      </p:sp>
+      <p:sp>
+        <p:nvSpPr>
+          <p:cNvPr id="16" name="TextBox 15"/>
+          <p:cNvSpPr txBox="1"/>
+          <p:nvPr/>
+        </p:nvSpPr>
+        <p:spPr>
+          <a:xfrm>
+            <a:off x="457200" y="5760720"/>
             <a:ext cx="10972800" cy="365760"/>
           </a:xfrm>
           <a:prstGeom prst="rect">
@@ -41769,126 +42086,14 @@
           </a:bodyPr>
           <a:lstStyle/>
           <a:p>
-            <a:pPr algn="l"/>
-            <a:r>
-              <a:rPr sz="1400" b="1">
-                <a:solidFill>
-                  <a:srgbClr val="606EF5"/>
-                </a:solidFill>
-              </a:rPr>
-              <a:t>🔀  Force a Branch — Deterministic Router Testing</a:t>
-            </a:r>
-          </a:p>
-        </p:txBody>
-      </p:sp>
-      <p:sp>
-        <p:nvSpPr>
-          <p:cNvPr id="14" name="TextBox 13"/>
-          <p:cNvSpPr txBox="1"/>
-          <p:nvPr/>
-        </p:nvSpPr>
-        <p:spPr>
-          <a:xfrm>
-            <a:off x="594360" y="3712527"/>
-            <a:ext cx="11064240" cy="457200"/>
-          </a:xfrm>
-          <a:prstGeom prst="rect">
-            <a:avLst/>
-          </a:prstGeom>
-          <a:noFill/>
-        </p:spPr>
-        <p:txBody>
-          <a:bodyPr wrap="square">
-            <a:spAutoFit/>
-          </a:bodyPr>
-          <a:lstStyle/>
-          <a:p>
-            <a:pPr algn="l"/>
-            <a:r>
-              <a:rPr sz="1100" b="0">
+            <a:pPr algn="ctr"/>
+            <a:r>
+              <a:rPr sz="1200" b="0">
                 <a:solidFill>
                   <a:srgbClr val="CBD5E1"/>
                 </a:solidFill>
               </a:rPr>
-              <a:t>The Run modal now shows a “Force branch” dropdown for every router node — pick Critical/Routine (or any labeled edge) to skip the LLM classification and reliably test one specific path, instead of guessing wording that happens to trigger it.</a:t>
-            </a:r>
-          </a:p>
-        </p:txBody>
-      </p:sp>
-      <p:sp>
-        <p:nvSpPr>
-          <p:cNvPr id="15" name="Rectangle 14"/>
-          <p:cNvSpPr/>
-          <p:nvPr/>
-        </p:nvSpPr>
-        <p:spPr>
-          <a:xfrm>
-            <a:off x="365760" y="4224528"/>
-            <a:ext cx="73152" cy="777240"/>
-          </a:xfrm>
-          <a:prstGeom prst="rect">
-            <a:avLst/>
-          </a:prstGeom>
-          <a:solidFill>
-            <a:srgbClr val="606EF5"/>
-          </a:solidFill>
-          <a:ln>
-            <a:noFill/>
-          </a:ln>
-          <a:effectLst/>
-        </p:spPr>
-        <p:style>
-          <a:lnRef idx="1">
-            <a:schemeClr val="accent1"/>
-          </a:lnRef>
-          <a:fillRef idx="3">
-            <a:schemeClr val="accent1"/>
-          </a:fillRef>
-          <a:effectRef idx="2">
-            <a:schemeClr val="accent1"/>
-          </a:effectRef>
-          <a:fontRef idx="minor">
-            <a:schemeClr val="lt1"/>
-          </a:fontRef>
-        </p:style>
-        <p:txBody>
-          <a:bodyPr rtlCol="0" anchor="ctr"/>
-          <a:lstStyle/>
-          <a:p>
-            <a:pPr algn="ctr"/>
-          </a:p>
-        </p:txBody>
-      </p:sp>
-      <p:sp>
-        <p:nvSpPr>
-          <p:cNvPr id="16" name="TextBox 15"/>
-          <p:cNvSpPr txBox="1"/>
-          <p:nvPr/>
-        </p:nvSpPr>
-        <p:spPr>
-          <a:xfrm>
-            <a:off x="594360" y="4242816"/>
-            <a:ext cx="10972800" cy="365760"/>
-          </a:xfrm>
-          <a:prstGeom prst="rect">
-            <a:avLst/>
-          </a:prstGeom>
-          <a:noFill/>
-        </p:spPr>
-        <p:txBody>
-          <a:bodyPr wrap="square">
-            <a:spAutoFit/>
-          </a:bodyPr>
-          <a:lstStyle/>
-          <a:p>
-            <a:pPr algn="l"/>
-            <a:r>
-              <a:rPr sz="1400" b="1">
-                <a:solidFill>
-                  <a:srgbClr val="606EF5"/>
-                </a:solidFill>
-              </a:rPr>
-              <a:t>✅  In-Canvas Approve/Reject</a:t>
+              <a:t>Accenture Technology  |  n.sureshmanikandan@accenture.com  |  Confidential</a:t>
             </a:r>
           </a:p>
         </p:txBody>
@@ -41896,152 +42101,6 @@
       <p:sp>
         <p:nvSpPr>
           <p:cNvPr id="17" name="TextBox 16"/>
-          <p:cNvSpPr txBox="1"/>
-          <p:nvPr/>
-        </p:nvSpPr>
-        <p:spPr>
-          <a:xfrm>
-            <a:off x="594360" y="4608639"/>
-            <a:ext cx="11064240" cy="457200"/>
-          </a:xfrm>
-          <a:prstGeom prst="rect">
-            <a:avLst/>
-          </a:prstGeom>
-          <a:noFill/>
-        </p:spPr>
-        <p:txBody>
-          <a:bodyPr wrap="square">
-            <a:spAutoFit/>
-          </a:bodyPr>
-          <a:lstStyle/>
-          <a:p>
-            <a:pPr algn="l"/>
-            <a:r>
-              <a:rPr sz="1100" b="0">
-                <a:solidFill>
-                  <a:srgbClr val="CBD5E1"/>
-                </a:solidFill>
-              </a:rPr>
-              <a:t>A paused run now surfaces an inline “Run paused for approval” banner directly in Workflow Builder with Approve/Reject buttons wired to the existing approval endpoints — testers no longer need the emailed link or a separate /approvals/{run_id} page to finish exercising the Critical path.</a:t>
-            </a:r>
-          </a:p>
-        </p:txBody>
-      </p:sp>
-      <p:sp>
-        <p:nvSpPr>
-          <p:cNvPr id="18" name="Rectangle 17"/>
-          <p:cNvSpPr/>
-          <p:nvPr/>
-        </p:nvSpPr>
-        <p:spPr>
-          <a:xfrm>
-            <a:off x="365760" y="5120640"/>
-            <a:ext cx="73152" cy="777240"/>
-          </a:xfrm>
-          <a:prstGeom prst="rect">
-            <a:avLst/>
-          </a:prstGeom>
-          <a:solidFill>
-            <a:srgbClr val="606EF5"/>
-          </a:solidFill>
-          <a:ln>
-            <a:noFill/>
-          </a:ln>
-          <a:effectLst/>
-        </p:spPr>
-        <p:style>
-          <a:lnRef idx="1">
-            <a:schemeClr val="accent1"/>
-          </a:lnRef>
-          <a:fillRef idx="3">
-            <a:schemeClr val="accent1"/>
-          </a:fillRef>
-          <a:effectRef idx="2">
-            <a:schemeClr val="accent1"/>
-          </a:effectRef>
-          <a:fontRef idx="minor">
-            <a:schemeClr val="lt1"/>
-          </a:fontRef>
-        </p:style>
-        <p:txBody>
-          <a:bodyPr rtlCol="0" anchor="ctr"/>
-          <a:lstStyle/>
-          <a:p>
-            <a:pPr algn="ctr"/>
-          </a:p>
-        </p:txBody>
-      </p:sp>
-      <p:sp>
-        <p:nvSpPr>
-          <p:cNvPr id="19" name="TextBox 18"/>
-          <p:cNvSpPr txBox="1"/>
-          <p:nvPr/>
-        </p:nvSpPr>
-        <p:spPr>
-          <a:xfrm>
-            <a:off x="594360" y="5138928"/>
-            <a:ext cx="10972800" cy="365760"/>
-          </a:xfrm>
-          <a:prstGeom prst="rect">
-            <a:avLst/>
-          </a:prstGeom>
-          <a:noFill/>
-        </p:spPr>
-        <p:txBody>
-          <a:bodyPr wrap="square">
-            <a:spAutoFit/>
-          </a:bodyPr>
-          <a:lstStyle/>
-          <a:p>
-            <a:pPr algn="l"/>
-            <a:r>
-              <a:rPr sz="1400" b="1">
-                <a:solidFill>
-                  <a:srgbClr val="606EF5"/>
-                </a:solidFill>
-              </a:rPr>
-              <a:t>🎨  Full-Path Visual Completion &amp; Amber Escalation Color</a:t>
-            </a:r>
-          </a:p>
-        </p:txBody>
-      </p:sp>
-      <p:sp>
-        <p:nvSpPr>
-          <p:cNvPr id="20" name="TextBox 19"/>
-          <p:cNvSpPr txBox="1"/>
-          <p:nvPr/>
-        </p:nvSpPr>
-        <p:spPr>
-          <a:xfrm>
-            <a:off x="594360" y="5504751"/>
-            <a:ext cx="11064240" cy="457200"/>
-          </a:xfrm>
-          <a:prstGeom prst="rect">
-            <a:avLst/>
-          </a:prstGeom>
-          <a:noFill/>
-        </p:spPr>
-        <p:txBody>
-          <a:bodyPr wrap="square">
-            <a:spAutoFit/>
-          </a:bodyPr>
-          <a:lstStyle/>
-          <a:p>
-            <a:pPr algn="l"/>
-            <a:r>
-              <a:rPr sz="1100" b="0">
-                <a:solidFill>
-                  <a:srgbClr val="CBD5E1"/>
-                </a:solidFill>
-              </a:rPr>
-              <a:t>Approving a paused run now marks every downstream node and edge as done on the canvas — not just the approval node itself — and the approval role's default color moved from red to amber so a normal paused-for-approval state no longer visually collides with the canvas's “error” red.</a:t>
-            </a:r>
-          </a:p>
-        </p:txBody>
-      </p:sp>
-      <p:sp>
-        <p:nvSpPr>
-          <p:cNvPr id="21" name="TextBox 20"/>
           <p:cNvSpPr txBox="1"/>
           <p:nvPr/>
         </p:nvSpPr>
@@ -42061,14 +42120,14 @@
           </a:bodyPr>
           <a:lstStyle/>
           <a:p>
-            <a:pPr algn="l"/>
+            <a:pPr algn="r"/>
             <a:r>
               <a:rPr sz="1100" b="0">
                 <a:solidFill>
                   <a:srgbClr val="CBD5E1"/>
                 </a:solidFill>
               </a:rPr>
-              <a:t>34a</a:t>
+              <a:t>37</a:t>
             </a:r>
           </a:p>
         </p:txBody>

--- a/docs/AgentForge-PresentationV10.pptx
+++ b/docs/AgentForge-PresentationV10.pptx
@@ -21266,7 +21266,7 @@
           <a:p>
             <a:pPr algn="l"/>
             <a:r>
-              <a:rPr sz="2800" b="1">
+              <a:rPr sz="2800" b="1" dirty="0">
                 <a:solidFill>
                   <a:srgbClr val="FFFFFF"/>
                 </a:solidFill>
@@ -21285,28 +21285,52 @@
         <p:spPr>
           <a:xfrm>
             <a:off x="457200" y="1005840"/>
-            <a:ext cx="11338560" cy="2011680"/>
-          </a:xfrm>
-          <a:prstGeom prst="rect">
-            <a:avLst/>
-          </a:prstGeom>
-          <a:noFill/>
-        </p:spPr>
-        <p:txBody>
-          <a:bodyPr wrap="square">
-            <a:spAutoFit/>
-          </a:bodyPr>
-          <a:lstStyle/>
-          <a:p>
-            <a:pPr algn="l"/>
-            <a:r>
-              <a:rPr sz="1400" b="0">
+            <a:ext cx="11338560" cy="1384995"/>
+          </a:xfrm>
+          <a:prstGeom prst="rect">
+            <a:avLst/>
+          </a:prstGeom>
+          <a:noFill/>
+        </p:spPr>
+        <p:txBody>
+          <a:bodyPr wrap="square">
+            <a:spAutoFit/>
+          </a:bodyPr>
+          <a:lstStyle/>
+          <a:p>
+            <a:pPr algn="l"/>
+            <a:r>
+              <a:rPr sz="1400" b="0" dirty="0" err="1">
                 <a:solidFill>
                   <a:srgbClr val="CBD5E1"/>
                 </a:solidFill>
               </a:rPr>
-              <a:t>AgentForge is an enterprise-grade AI Agent Platform that empowers Accenture developers and clients to design, build, simulate, deploy, and govern intelligent AI agents at scale — without deep ML expertise.
-Powered by Azure OpenAI GPT-5.4-mini, it delivers a full-stack solution: a conversational Planning Architect (Prompt-to-Agent), a visual Workflow Builder, a built-in RAG pipeline, enterprise guardrails (PII + hallucination detection), multi-agent orchestration, voice agent support, and a real-time Control Plane — all with RBAC, audit logs, and OpenTelemetry observability baked in.</a:t>
+              <a:t>AgentForge</a:t>
+            </a:r>
+            <a:r>
+              <a:rPr sz="1400" b="0" dirty="0">
+                <a:solidFill>
+                  <a:srgbClr val="CBD5E1"/>
+                </a:solidFill>
+              </a:rPr>
+              <a:t> is an enterprise-grade AI Agent Platform that empowers developers and clients to design, build, simulate, deploy, and govern intelligent AI agents at scale — without deep ML expertise.
+Powered by Azure OpenAI GPT-5.4-mini, it delivers a full-stack solution: a conversational Planning Architect (Prompt-to-Agent), a visual Workflow Builder, a built-in RAG pipeline, enterprise guardrails (PII + hallucination detection), multi-agent orchestration, voice agent support, and a real-time Control Plane — all with RBAC, audit logs, and Open</a:t>
+            </a:r>
+            <a:r>
+              <a:rPr lang="en-US" sz="1400" dirty="0">
+                <a:solidFill>
+                  <a:srgbClr val="CBD5E1"/>
+                </a:solidFill>
+              </a:rPr>
+              <a:t>-</a:t>
+            </a:r>
+            <a:r>
+              <a:rPr sz="1400" b="0" dirty="0">
+                <a:solidFill>
+                  <a:srgbClr val="CBD5E1"/>
+                </a:solidFill>
+              </a:rPr>
+              <a:t>Telemetry observability baked in.</a:t>
             </a:r>
           </a:p>
         </p:txBody>
@@ -21880,27 +21904,27 @@
         <p:spPr>
           <a:xfrm>
             <a:off x="457200" y="4937760"/>
-            <a:ext cx="10972800" cy="457200"/>
-          </a:xfrm>
-          <a:prstGeom prst="rect">
-            <a:avLst/>
-          </a:prstGeom>
-          <a:noFill/>
-        </p:spPr>
-        <p:txBody>
-          <a:bodyPr wrap="square">
-            <a:spAutoFit/>
-          </a:bodyPr>
-          <a:lstStyle/>
-          <a:p>
-            <a:pPr algn="ctr"/>
-            <a:r>
-              <a:rPr sz="1400" b="1">
+            <a:ext cx="10972800" cy="307777"/>
+          </a:xfrm>
+          <a:prstGeom prst="rect">
+            <a:avLst/>
+          </a:prstGeom>
+          <a:noFill/>
+        </p:spPr>
+        <p:txBody>
+          <a:bodyPr wrap="square">
+            <a:spAutoFit/>
+          </a:bodyPr>
+          <a:lstStyle/>
+          <a:p>
+            <a:pPr algn="ctr"/>
+            <a:r>
+              <a:rPr sz="1400" b="1" dirty="0">
                 <a:solidFill>
                   <a:srgbClr val="10B981"/>
                 </a:solidFill>
               </a:rPr>
-              <a:t>Designed for Accenture | Delivered with Azure | Governed by Design</a:t>
+              <a:t>Designed | Delivered with Azure | Governed by Design</a:t>
             </a:r>
           </a:p>
         </p:txBody>
@@ -42073,27 +42097,27 @@
         <p:spPr>
           <a:xfrm>
             <a:off x="457200" y="5760720"/>
-            <a:ext cx="10972800" cy="365760"/>
-          </a:xfrm>
-          <a:prstGeom prst="rect">
-            <a:avLst/>
-          </a:prstGeom>
-          <a:noFill/>
-        </p:spPr>
-        <p:txBody>
-          <a:bodyPr wrap="square">
-            <a:spAutoFit/>
-          </a:bodyPr>
-          <a:lstStyle/>
-          <a:p>
-            <a:pPr algn="ctr"/>
-            <a:r>
-              <a:rPr sz="1200" b="0">
+            <a:ext cx="10972800" cy="276999"/>
+          </a:xfrm>
+          <a:prstGeom prst="rect">
+            <a:avLst/>
+          </a:prstGeom>
+          <a:noFill/>
+        </p:spPr>
+        <p:txBody>
+          <a:bodyPr wrap="square">
+            <a:spAutoFit/>
+          </a:bodyPr>
+          <a:lstStyle/>
+          <a:p>
+            <a:pPr algn="ctr"/>
+            <a:r>
+              <a:rPr sz="1200" b="0" dirty="0">
                 <a:solidFill>
                   <a:srgbClr val="CBD5E1"/>
                 </a:solidFill>
               </a:rPr>
-              <a:t>Accenture Technology  |  n.sureshmanikandan@accenture.com  |  Confidential</a:t>
+              <a:t> Technology  |  n.sureshmanikandan@accenture.com  |  Confidential</a:t>
             </a:r>
           </a:p>
         </p:txBody>
@@ -52394,27 +52418,51 @@
         <p:spPr>
           <a:xfrm>
             <a:off x="594360" y="1444752"/>
-            <a:ext cx="10972800" cy="658368"/>
-          </a:xfrm>
-          <a:prstGeom prst="rect">
-            <a:avLst/>
-          </a:prstGeom>
-          <a:noFill/>
-        </p:spPr>
-        <p:txBody>
-          <a:bodyPr wrap="square">
-            <a:spAutoFit/>
-          </a:bodyPr>
-          <a:lstStyle/>
-          <a:p>
-            <a:pPr algn="l"/>
-            <a:r>
-              <a:rPr sz="1250" b="0">
+            <a:ext cx="10972800" cy="477054"/>
+          </a:xfrm>
+          <a:prstGeom prst="rect">
+            <a:avLst/>
+          </a:prstGeom>
+          <a:noFill/>
+        </p:spPr>
+        <p:txBody>
+          <a:bodyPr wrap="square">
+            <a:spAutoFit/>
+          </a:bodyPr>
+          <a:lstStyle/>
+          <a:p>
+            <a:pPr algn="l"/>
+            <a:r>
+              <a:rPr sz="1250" b="0" dirty="0" err="1">
                 <a:solidFill>
                   <a:srgbClr val="CBD5E1"/>
                 </a:solidFill>
               </a:rPr>
-              <a:t>AgentForge directly advances Accenture's AI-first mandate by creating a reusable internal platform that accelerates client delivery of AI agents. Every engagement that uses AgentForge compresses delivery timelines by 60–85%, improving margin and client NPS simultaneously.</a:t>
+              <a:t>AgentForge</a:t>
+            </a:r>
+            <a:r>
+              <a:rPr sz="1250" b="0" dirty="0">
+                <a:solidFill>
+                  <a:srgbClr val="CBD5E1"/>
+                </a:solidFill>
+              </a:rPr>
+              <a:t> directly advances 's AI-first mandate by creating a reusable internal platform that accelerates client delivery of AI agents. Every engagement that uses </a:t>
+            </a:r>
+            <a:r>
+              <a:rPr sz="1250" b="0" dirty="0" err="1">
+                <a:solidFill>
+                  <a:srgbClr val="CBD5E1"/>
+                </a:solidFill>
+              </a:rPr>
+              <a:t>AgentForge</a:t>
+            </a:r>
+            <a:r>
+              <a:rPr sz="1250" b="0" dirty="0">
+                <a:solidFill>
+                  <a:srgbClr val="CBD5E1"/>
+                </a:solidFill>
+              </a:rPr>
+              <a:t> compresses delivery timelines by 60–85%, improving margin and client NPS simultaneously.</a:t>
             </a:r>
           </a:p>
         </p:txBody>
@@ -52506,27 +52554,59 @@
         <p:spPr>
           <a:xfrm>
             <a:off x="594360" y="2770632"/>
-            <a:ext cx="10972800" cy="658368"/>
-          </a:xfrm>
-          <a:prstGeom prst="rect">
-            <a:avLst/>
-          </a:prstGeom>
-          <a:noFill/>
-        </p:spPr>
-        <p:txBody>
-          <a:bodyPr wrap="square">
-            <a:spAutoFit/>
-          </a:bodyPr>
-          <a:lstStyle/>
-          <a:p>
-            <a:pPr algn="l"/>
-            <a:r>
-              <a:rPr sz="1250" b="0">
+            <a:ext cx="10972800" cy="477054"/>
+          </a:xfrm>
+          <a:prstGeom prst="rect">
+            <a:avLst/>
+          </a:prstGeom>
+          <a:noFill/>
+        </p:spPr>
+        <p:txBody>
+          <a:bodyPr wrap="square">
+            <a:spAutoFit/>
+          </a:bodyPr>
+          <a:lstStyle/>
+          <a:p>
+            <a:pPr algn="l"/>
+            <a:r>
+              <a:rPr sz="1250" b="0" dirty="0">
                 <a:solidFill>
                   <a:srgbClr val="CBD5E1"/>
                 </a:solidFill>
               </a:rPr>
-              <a:t>No competitor today combines Prompt-to-Agent generation, built-in enterprise guardrails (PII+hallucination), voice agents, and a full observability stack in a single deployable platform. AgentForge positions Accenture as the go-to partner for enterprise-grade AI agent deployments.</a:t>
+              <a:t>No competitor today combines Prompt-to-Agent generation, built-in enterprise guardrails (</a:t>
+            </a:r>
+            <a:r>
+              <a:rPr sz="1250" b="0" dirty="0" err="1">
+                <a:solidFill>
+                  <a:srgbClr val="CBD5E1"/>
+                </a:solidFill>
+              </a:rPr>
+              <a:t>PII+hallucination</a:t>
+            </a:r>
+            <a:r>
+              <a:rPr sz="1250" b="0" dirty="0">
+                <a:solidFill>
+                  <a:srgbClr val="CBD5E1"/>
+                </a:solidFill>
+              </a:rPr>
+              <a:t>), voice agents, and a full observability stack in a single deployable platform. </a:t>
+            </a:r>
+            <a:r>
+              <a:rPr sz="1250" b="0" dirty="0" err="1">
+                <a:solidFill>
+                  <a:srgbClr val="CBD5E1"/>
+                </a:solidFill>
+              </a:rPr>
+              <a:t>AgentForge</a:t>
+            </a:r>
+            <a:r>
+              <a:rPr sz="1250" b="0" dirty="0">
+                <a:solidFill>
+                  <a:srgbClr val="CBD5E1"/>
+                </a:solidFill>
+              </a:rPr>
+              <a:t> positions  as the go-to partner for enterprise-grade AI agent deployments.</a:t>
             </a:r>
           </a:p>
         </p:txBody>
@@ -52730,27 +52810,43 @@
         <p:spPr>
           <a:xfrm>
             <a:off x="594360" y="5422391"/>
-            <a:ext cx="10972800" cy="658368"/>
-          </a:xfrm>
-          <a:prstGeom prst="rect">
-            <a:avLst/>
-          </a:prstGeom>
-          <a:noFill/>
-        </p:spPr>
-        <p:txBody>
-          <a:bodyPr wrap="square">
-            <a:spAutoFit/>
-          </a:bodyPr>
-          <a:lstStyle/>
-          <a:p>
-            <a:pPr algn="l"/>
-            <a:r>
-              <a:rPr sz="1250" b="0">
+            <a:ext cx="10972800" cy="477054"/>
+          </a:xfrm>
+          <a:prstGeom prst="rect">
+            <a:avLst/>
+          </a:prstGeom>
+          <a:noFill/>
+        </p:spPr>
+        <p:txBody>
+          <a:bodyPr wrap="square">
+            <a:spAutoFit/>
+          </a:bodyPr>
+          <a:lstStyle/>
+          <a:p>
+            <a:pPr algn="l"/>
+            <a:r>
+              <a:rPr sz="1250" b="0" dirty="0">
                 <a:solidFill>
                   <a:srgbClr val="CBD5E1"/>
                 </a:solidFill>
               </a:rPr>
-              <a:t>The Blueprints Marketplace creates a virtuous cycle: every agent built on AgentForge adds to the shared library, reducing future build cost. Over 24 months this compounds into a proprietary IP moat for Accenture's AI practice.</a:t>
+              <a:t>The Blueprints Marketplace creates a virtuous cycle: every agent built on </a:t>
+            </a:r>
+            <a:r>
+              <a:rPr sz="1250" b="0" dirty="0" err="1">
+                <a:solidFill>
+                  <a:srgbClr val="CBD5E1"/>
+                </a:solidFill>
+              </a:rPr>
+              <a:t>AgentForge</a:t>
+            </a:r>
+            <a:r>
+              <a:rPr sz="1250" b="0" dirty="0">
+                <a:solidFill>
+                  <a:srgbClr val="CBD5E1"/>
+                </a:solidFill>
+              </a:rPr>
+              <a:t> adds to the shared library, reducing future build cost. Over 24 months this compounds into a proprietary IP moat for 's AI practice.</a:t>
             </a:r>
           </a:p>
         </p:txBody>

--- a/docs/AgentForge-PresentationV10.pptx
+++ b/docs/AgentForge-PresentationV10.pptx
@@ -3352,7 +3352,7 @@
         <p:spPr>
           <a:xfrm>
             <a:off x="365760" y="2377440"/>
-            <a:ext cx="8229600" cy="1280160"/>
+            <a:ext cx="8229600" cy="830997"/>
           </a:xfrm>
           <a:prstGeom prst="rect">
             <a:avLst/>
@@ -3372,7 +3372,15 @@
                   <a:srgbClr val="FFFFFF"/>
                 </a:solidFill>
               </a:rPr>
-              <a:t>Enterprise AI Agent Platform</a:t>
+              <a:t>AI </a:t>
+            </a:r>
+            <a:r>
+              <a:rPr sz="4800" b="1" dirty="0">
+                <a:solidFill>
+                  <a:srgbClr val="FFFFFF"/>
+                </a:solidFill>
+              </a:rPr>
+              <a:t>Agent Platform</a:t>
             </a:r>
           </a:p>
         </p:txBody>
